--- a/data/sample-step3.pptx
+++ b/data/sample-step3.pptx
@@ -780,9 +780,32 @@
           </a:p>
         </p:txBody>
       </p:sp>
-      <p:sp>
-        <p:nvSpPr>
-          <p:cNvPr id="10" name=""/>
+      <p:pic>
+        <p:nvPicPr>
+          <p:cNvPr id="10" name="" descr=""/>
+          <p:cNvPicPr/>
+          <p:nvPr/>
+        </p:nvPicPr>
+        <p:blipFill>
+          <a:blip r:embed="rId1"/>
+          <a:stretch/>
+        </p:blipFill>
+        <p:spPr>
+          <a:xfrm>
+            <a:off x="4809960" y="-190440"/>
+            <a:ext cx="2571480" cy="2571480"/>
+          </a:xfrm>
+          <a:prstGeom prst="rect">
+            <a:avLst/>
+          </a:prstGeom>
+          <a:ln w="0">
+            <a:noFill/>
+          </a:ln>
+        </p:spPr>
+      </p:pic>
+      <p:sp>
+        <p:nvSpPr>
+          <p:cNvPr id="11" name=""/>
           <p:cNvSpPr/>
           <p:nvPr/>
         </p:nvSpPr>
@@ -840,7 +863,7 @@
       </p:sp>
       <p:sp>
         <p:nvSpPr>
-          <p:cNvPr id="11" name=""/>
+          <p:cNvPr id="12" name=""/>
           <p:cNvSpPr txBox="1"/>
           <p:nvPr/>
         </p:nvSpPr>
@@ -883,7 +906,7 @@
       </p:sp>
       <p:sp>
         <p:nvSpPr>
-          <p:cNvPr id="12" name=""/>
+          <p:cNvPr id="13" name=""/>
           <p:cNvSpPr txBox="1"/>
           <p:nvPr/>
         </p:nvSpPr>
@@ -926,7 +949,7 @@
       </p:sp>
       <p:sp>
         <p:nvSpPr>
-          <p:cNvPr id="13" name=""/>
+          <p:cNvPr id="14" name=""/>
           <p:cNvSpPr txBox="1"/>
           <p:nvPr/>
         </p:nvSpPr>
@@ -969,7 +992,7 @@
       </p:sp>
       <p:sp>
         <p:nvSpPr>
-          <p:cNvPr id="14" name=""/>
+          <p:cNvPr id="15" name=""/>
           <p:cNvSpPr txBox="1"/>
           <p:nvPr/>
         </p:nvSpPr>
@@ -1042,7 +1065,7 @@
       </p:grpSpPr>
       <p:sp>
         <p:nvSpPr>
-          <p:cNvPr id="317" name=""/>
+          <p:cNvPr id="325" name=""/>
           <p:cNvSpPr/>
           <p:nvPr/>
         </p:nvSpPr>
@@ -1100,7 +1123,7 @@
       </p:sp>
       <p:sp>
         <p:nvSpPr>
-          <p:cNvPr id="318" name=""/>
+          <p:cNvPr id="326" name=""/>
           <p:cNvSpPr/>
           <p:nvPr/>
         </p:nvSpPr>
@@ -1158,7 +1181,7 @@
       </p:sp>
       <p:sp>
         <p:nvSpPr>
-          <p:cNvPr id="319" name=""/>
+          <p:cNvPr id="327" name=""/>
           <p:cNvSpPr/>
           <p:nvPr/>
         </p:nvSpPr>
@@ -1216,7 +1239,7 @@
       </p:sp>
       <p:sp>
         <p:nvSpPr>
-          <p:cNvPr id="320" name=""/>
+          <p:cNvPr id="328" name=""/>
           <p:cNvSpPr/>
           <p:nvPr/>
         </p:nvSpPr>
@@ -1432,9 +1455,32 @@
           </a:p>
         </p:txBody>
       </p:sp>
-      <p:sp>
-        <p:nvSpPr>
-          <p:cNvPr id="321" name=""/>
+      <p:pic>
+        <p:nvPicPr>
+          <p:cNvPr id="329" name="" descr=""/>
+          <p:cNvPicPr/>
+          <p:nvPr/>
+        </p:nvPicPr>
+        <p:blipFill>
+          <a:blip r:embed="rId1"/>
+          <a:stretch/>
+        </p:blipFill>
+        <p:spPr>
+          <a:xfrm>
+            <a:off x="10515600" y="38160"/>
+            <a:ext cx="1142640" cy="1142640"/>
+          </a:xfrm>
+          <a:prstGeom prst="rect">
+            <a:avLst/>
+          </a:prstGeom>
+          <a:ln w="0">
+            <a:noFill/>
+          </a:ln>
+        </p:spPr>
+      </p:pic>
+      <p:sp>
+        <p:nvSpPr>
+          <p:cNvPr id="330" name=""/>
           <p:cNvSpPr/>
           <p:nvPr/>
         </p:nvSpPr>
@@ -1560,7 +1606,7 @@
       </p:sp>
       <p:sp>
         <p:nvSpPr>
-          <p:cNvPr id="322" name=""/>
+          <p:cNvPr id="331" name=""/>
           <p:cNvSpPr txBox="1"/>
           <p:nvPr/>
         </p:nvSpPr>
@@ -1603,7 +1649,7 @@
       </p:sp>
       <p:sp>
         <p:nvSpPr>
-          <p:cNvPr id="323" name=""/>
+          <p:cNvPr id="332" name=""/>
           <p:cNvSpPr txBox="1"/>
           <p:nvPr/>
         </p:nvSpPr>
@@ -1646,7 +1692,7 @@
       </p:sp>
       <p:sp>
         <p:nvSpPr>
-          <p:cNvPr id="324" name=""/>
+          <p:cNvPr id="333" name=""/>
           <p:cNvSpPr txBox="1"/>
           <p:nvPr/>
         </p:nvSpPr>
@@ -1689,7 +1735,7 @@
       </p:sp>
       <p:sp>
         <p:nvSpPr>
-          <p:cNvPr id="325" name=""/>
+          <p:cNvPr id="334" name=""/>
           <p:cNvSpPr txBox="1"/>
           <p:nvPr/>
         </p:nvSpPr>
@@ -1732,7 +1778,7 @@
       </p:sp>
       <p:sp>
         <p:nvSpPr>
-          <p:cNvPr id="326" name=""/>
+          <p:cNvPr id="335" name=""/>
           <p:cNvSpPr txBox="1"/>
           <p:nvPr/>
         </p:nvSpPr>
@@ -1775,7 +1821,7 @@
       </p:sp>
       <p:sp>
         <p:nvSpPr>
-          <p:cNvPr id="327" name=""/>
+          <p:cNvPr id="336" name=""/>
           <p:cNvSpPr txBox="1"/>
           <p:nvPr/>
         </p:nvSpPr>
@@ -1818,7 +1864,7 @@
       </p:sp>
       <p:sp>
         <p:nvSpPr>
-          <p:cNvPr id="328" name=""/>
+          <p:cNvPr id="337" name=""/>
           <p:cNvSpPr txBox="1"/>
           <p:nvPr/>
         </p:nvSpPr>
@@ -1861,7 +1907,7 @@
       </p:sp>
       <p:sp>
         <p:nvSpPr>
-          <p:cNvPr id="329" name=""/>
+          <p:cNvPr id="338" name=""/>
           <p:cNvSpPr txBox="1"/>
           <p:nvPr/>
         </p:nvSpPr>
@@ -1904,7 +1950,7 @@
       </p:sp>
       <p:sp>
         <p:nvSpPr>
-          <p:cNvPr id="330" name=""/>
+          <p:cNvPr id="339" name=""/>
           <p:cNvSpPr/>
           <p:nvPr/>
         </p:nvSpPr>
@@ -2030,7 +2076,7 @@
       </p:sp>
       <p:sp>
         <p:nvSpPr>
-          <p:cNvPr id="331" name=""/>
+          <p:cNvPr id="340" name=""/>
           <p:cNvSpPr txBox="1"/>
           <p:nvPr/>
         </p:nvSpPr>
@@ -2073,7 +2119,7 @@
       </p:sp>
       <p:sp>
         <p:nvSpPr>
-          <p:cNvPr id="332" name=""/>
+          <p:cNvPr id="341" name=""/>
           <p:cNvSpPr txBox="1"/>
           <p:nvPr/>
         </p:nvSpPr>
@@ -2116,7 +2162,7 @@
       </p:sp>
       <p:sp>
         <p:nvSpPr>
-          <p:cNvPr id="333" name=""/>
+          <p:cNvPr id="342" name=""/>
           <p:cNvSpPr txBox="1"/>
           <p:nvPr/>
         </p:nvSpPr>
@@ -2159,7 +2205,7 @@
       </p:sp>
       <p:sp>
         <p:nvSpPr>
-          <p:cNvPr id="334" name=""/>
+          <p:cNvPr id="343" name=""/>
           <p:cNvSpPr txBox="1"/>
           <p:nvPr/>
         </p:nvSpPr>
@@ -2212,7 +2258,7 @@
       </p:sp>
       <p:sp>
         <p:nvSpPr>
-          <p:cNvPr id="335" name=""/>
+          <p:cNvPr id="344" name=""/>
           <p:cNvSpPr txBox="1"/>
           <p:nvPr/>
         </p:nvSpPr>
@@ -2255,7 +2301,7 @@
       </p:sp>
       <p:sp>
         <p:nvSpPr>
-          <p:cNvPr id="336" name=""/>
+          <p:cNvPr id="345" name=""/>
           <p:cNvSpPr txBox="1"/>
           <p:nvPr/>
         </p:nvSpPr>
@@ -2298,7 +2344,7 @@
       </p:sp>
       <p:sp>
         <p:nvSpPr>
-          <p:cNvPr id="337" name=""/>
+          <p:cNvPr id="346" name=""/>
           <p:cNvSpPr txBox="1"/>
           <p:nvPr/>
         </p:nvSpPr>
@@ -2341,7 +2387,7 @@
       </p:sp>
       <p:sp>
         <p:nvSpPr>
-          <p:cNvPr id="338" name=""/>
+          <p:cNvPr id="347" name=""/>
           <p:cNvSpPr txBox="1"/>
           <p:nvPr/>
         </p:nvSpPr>
@@ -2384,7 +2430,7 @@
       </p:sp>
       <p:sp>
         <p:nvSpPr>
-          <p:cNvPr id="339" name=""/>
+          <p:cNvPr id="348" name=""/>
           <p:cNvSpPr/>
           <p:nvPr/>
         </p:nvSpPr>
@@ -2510,7 +2556,7 @@
       </p:sp>
       <p:sp>
         <p:nvSpPr>
-          <p:cNvPr id="340" name=""/>
+          <p:cNvPr id="349" name=""/>
           <p:cNvSpPr txBox="1"/>
           <p:nvPr/>
         </p:nvSpPr>
@@ -2553,7 +2599,7 @@
       </p:sp>
       <p:sp>
         <p:nvSpPr>
-          <p:cNvPr id="341" name=""/>
+          <p:cNvPr id="350" name=""/>
           <p:cNvSpPr txBox="1"/>
           <p:nvPr/>
         </p:nvSpPr>
@@ -2596,7 +2642,7 @@
       </p:sp>
       <p:sp>
         <p:nvSpPr>
-          <p:cNvPr id="342" name=""/>
+          <p:cNvPr id="351" name=""/>
           <p:cNvSpPr txBox="1"/>
           <p:nvPr/>
         </p:nvSpPr>
@@ -2639,7 +2685,7 @@
       </p:sp>
       <p:sp>
         <p:nvSpPr>
-          <p:cNvPr id="343" name=""/>
+          <p:cNvPr id="352" name=""/>
           <p:cNvSpPr txBox="1"/>
           <p:nvPr/>
         </p:nvSpPr>
@@ -2682,7 +2728,7 @@
       </p:sp>
       <p:sp>
         <p:nvSpPr>
-          <p:cNvPr id="344" name=""/>
+          <p:cNvPr id="353" name=""/>
           <p:cNvSpPr/>
           <p:nvPr/>
         </p:nvSpPr>
@@ -2809,7 +2855,7 @@
       </p:sp>
       <p:sp>
         <p:nvSpPr>
-          <p:cNvPr id="345" name=""/>
+          <p:cNvPr id="354" name=""/>
           <p:cNvSpPr txBox="1"/>
           <p:nvPr/>
         </p:nvSpPr>
@@ -2852,7 +2898,7 @@
       </p:sp>
       <p:sp>
         <p:nvSpPr>
-          <p:cNvPr id="346" name=""/>
+          <p:cNvPr id="355" name=""/>
           <p:cNvSpPr txBox="1"/>
           <p:nvPr/>
         </p:nvSpPr>
@@ -2895,7 +2941,7 @@
       </p:sp>
       <p:sp>
         <p:nvSpPr>
-          <p:cNvPr id="347" name=""/>
+          <p:cNvPr id="356" name=""/>
           <p:cNvSpPr txBox="1"/>
           <p:nvPr/>
         </p:nvSpPr>
@@ -2938,7 +2984,7 @@
       </p:sp>
       <p:sp>
         <p:nvSpPr>
-          <p:cNvPr id="348" name=""/>
+          <p:cNvPr id="357" name=""/>
           <p:cNvSpPr txBox="1"/>
           <p:nvPr/>
         </p:nvSpPr>
@@ -2991,7 +3037,7 @@
       </p:sp>
       <p:sp>
         <p:nvSpPr>
-          <p:cNvPr id="349" name=""/>
+          <p:cNvPr id="358" name=""/>
           <p:cNvSpPr txBox="1"/>
           <p:nvPr/>
         </p:nvSpPr>
@@ -3034,7 +3080,7 @@
       </p:sp>
       <p:sp>
         <p:nvSpPr>
-          <p:cNvPr id="350" name=""/>
+          <p:cNvPr id="359" name=""/>
           <p:cNvSpPr/>
           <p:nvPr/>
         </p:nvSpPr>
@@ -3161,7 +3207,7 @@
       </p:sp>
       <p:sp>
         <p:nvSpPr>
-          <p:cNvPr id="351" name=""/>
+          <p:cNvPr id="360" name=""/>
           <p:cNvSpPr txBox="1"/>
           <p:nvPr/>
         </p:nvSpPr>
@@ -3214,7 +3260,7 @@
       </p:sp>
       <p:sp>
         <p:nvSpPr>
-          <p:cNvPr id="352" name=""/>
+          <p:cNvPr id="361" name=""/>
           <p:cNvSpPr txBox="1"/>
           <p:nvPr/>
         </p:nvSpPr>
@@ -3257,7 +3303,7 @@
       </p:sp>
       <p:sp>
         <p:nvSpPr>
-          <p:cNvPr id="353" name=""/>
+          <p:cNvPr id="362" name=""/>
           <p:cNvSpPr txBox="1"/>
           <p:nvPr/>
         </p:nvSpPr>
@@ -3300,7 +3346,7 @@
       </p:sp>
       <p:sp>
         <p:nvSpPr>
-          <p:cNvPr id="354" name=""/>
+          <p:cNvPr id="363" name=""/>
           <p:cNvSpPr txBox="1"/>
           <p:nvPr/>
         </p:nvSpPr>
@@ -3343,7 +3389,7 @@
       </p:sp>
       <p:sp>
         <p:nvSpPr>
-          <p:cNvPr id="355" name=""/>
+          <p:cNvPr id="364" name=""/>
           <p:cNvSpPr txBox="1"/>
           <p:nvPr/>
         </p:nvSpPr>
@@ -3386,7 +3432,7 @@
       </p:sp>
       <p:sp>
         <p:nvSpPr>
-          <p:cNvPr id="356" name=""/>
+          <p:cNvPr id="365" name=""/>
           <p:cNvSpPr txBox="1"/>
           <p:nvPr/>
         </p:nvSpPr>
@@ -3429,7 +3475,7 @@
       </p:sp>
       <p:sp>
         <p:nvSpPr>
-          <p:cNvPr id="357" name=""/>
+          <p:cNvPr id="366" name=""/>
           <p:cNvSpPr txBox="1"/>
           <p:nvPr/>
         </p:nvSpPr>
@@ -3472,7 +3518,7 @@
       </p:sp>
       <p:sp>
         <p:nvSpPr>
-          <p:cNvPr id="358" name=""/>
+          <p:cNvPr id="367" name=""/>
           <p:cNvSpPr txBox="1"/>
           <p:nvPr/>
         </p:nvSpPr>
@@ -3515,7 +3561,7 @@
       </p:sp>
       <p:sp>
         <p:nvSpPr>
-          <p:cNvPr id="359" name=""/>
+          <p:cNvPr id="368" name=""/>
           <p:cNvSpPr txBox="1"/>
           <p:nvPr/>
         </p:nvSpPr>
@@ -3558,7 +3604,7 @@
       </p:sp>
       <p:sp>
         <p:nvSpPr>
-          <p:cNvPr id="360" name=""/>
+          <p:cNvPr id="369" name=""/>
           <p:cNvSpPr/>
           <p:nvPr/>
         </p:nvSpPr>
@@ -3696,7 +3742,7 @@
       </p:sp>
       <p:sp>
         <p:nvSpPr>
-          <p:cNvPr id="361" name=""/>
+          <p:cNvPr id="370" name=""/>
           <p:cNvSpPr txBox="1"/>
           <p:nvPr/>
         </p:nvSpPr>
@@ -3739,7 +3785,7 @@
       </p:sp>
       <p:sp>
         <p:nvSpPr>
-          <p:cNvPr id="362" name=""/>
+          <p:cNvPr id="371" name=""/>
           <p:cNvSpPr txBox="1"/>
           <p:nvPr/>
         </p:nvSpPr>
@@ -3812,7 +3858,7 @@
       </p:grpSpPr>
       <p:sp>
         <p:nvSpPr>
-          <p:cNvPr id="363" name=""/>
+          <p:cNvPr id="372" name=""/>
           <p:cNvSpPr/>
           <p:nvPr/>
         </p:nvSpPr>
@@ -3870,7 +3916,7 @@
       </p:sp>
       <p:sp>
         <p:nvSpPr>
-          <p:cNvPr id="364" name=""/>
+          <p:cNvPr id="373" name=""/>
           <p:cNvSpPr/>
           <p:nvPr/>
         </p:nvSpPr>
@@ -3928,7 +3974,7 @@
       </p:sp>
       <p:sp>
         <p:nvSpPr>
-          <p:cNvPr id="365" name=""/>
+          <p:cNvPr id="374" name=""/>
           <p:cNvSpPr/>
           <p:nvPr/>
         </p:nvSpPr>
@@ -3986,7 +4032,7 @@
       </p:sp>
       <p:sp>
         <p:nvSpPr>
-          <p:cNvPr id="366" name=""/>
+          <p:cNvPr id="375" name=""/>
           <p:cNvSpPr/>
           <p:nvPr/>
         </p:nvSpPr>
@@ -4202,52 +4248,9 @@
           </a:p>
         </p:txBody>
       </p:sp>
-      <p:sp>
-        <p:nvSpPr>
-          <p:cNvPr id="367" name=""/>
-          <p:cNvSpPr txBox="1"/>
-          <p:nvPr/>
-        </p:nvSpPr>
-        <p:spPr>
-          <a:xfrm>
-            <a:off x="533520" y="870120"/>
-            <a:ext cx="8827560" cy="399600"/>
-          </a:xfrm>
-          <a:prstGeom prst="rect">
-            <a:avLst/>
-          </a:prstGeom>
-          <a:noFill/>
-          <a:ln w="0">
-            <a:noFill/>
-          </a:ln>
-        </p:spPr>
-        <p:txBody>
-          <a:bodyPr wrap="none" lIns="0" rIns="0" tIns="0" bIns="0" anchor="t">
-            <a:noAutofit/>
-          </a:bodyPr>
-          <a:p>
-            <a:r>
-              <a:rPr b="0" lang="zh-CN" sz="2170" spc="-1" strike="noStrike">
-                <a:solidFill>
-                  <a:srgbClr val="111111"/>
-                </a:solidFill>
-                <a:latin typeface="NotoSansCJKjp"/>
-                <a:ea typeface="NotoSansCJKjp"/>
-              </a:rPr>
-              <a:t>提案⼿法をすべて統合することで、認識性能が⾶躍的に向上しました。</a:t>
-            </a:r>
-            <a:endParaRPr b="0" lang="en-US" sz="2170" spc="-1" strike="noStrike">
-              <a:solidFill>
-                <a:srgbClr val="000000"/>
-              </a:solidFill>
-              <a:latin typeface="Times New Roman"/>
-            </a:endParaRPr>
-          </a:p>
-        </p:txBody>
-      </p:sp>
       <p:pic>
         <p:nvPicPr>
-          <p:cNvPr id="368" name="" descr=""/>
+          <p:cNvPr id="376" name="" descr=""/>
           <p:cNvPicPr/>
           <p:nvPr/>
         </p:nvPicPr>
@@ -4257,6 +4260,72 @@
         </p:blipFill>
         <p:spPr>
           <a:xfrm>
+            <a:off x="10515600" y="38160"/>
+            <a:ext cx="1142640" cy="1142640"/>
+          </a:xfrm>
+          <a:prstGeom prst="rect">
+            <a:avLst/>
+          </a:prstGeom>
+          <a:ln w="0">
+            <a:noFill/>
+          </a:ln>
+        </p:spPr>
+      </p:pic>
+      <p:sp>
+        <p:nvSpPr>
+          <p:cNvPr id="377" name=""/>
+          <p:cNvSpPr txBox="1"/>
+          <p:nvPr/>
+        </p:nvSpPr>
+        <p:spPr>
+          <a:xfrm>
+            <a:off x="533520" y="870120"/>
+            <a:ext cx="8827560" cy="399600"/>
+          </a:xfrm>
+          <a:prstGeom prst="rect">
+            <a:avLst/>
+          </a:prstGeom>
+          <a:noFill/>
+          <a:ln w="0">
+            <a:noFill/>
+          </a:ln>
+        </p:spPr>
+        <p:txBody>
+          <a:bodyPr wrap="none" lIns="0" rIns="0" tIns="0" bIns="0" anchor="t">
+            <a:noAutofit/>
+          </a:bodyPr>
+          <a:p>
+            <a:r>
+              <a:rPr b="0" lang="zh-CN" sz="2170" spc="-1" strike="noStrike">
+                <a:solidFill>
+                  <a:srgbClr val="111111"/>
+                </a:solidFill>
+                <a:latin typeface="NotoSansCJKjp"/>
+                <a:ea typeface="NotoSansCJKjp"/>
+              </a:rPr>
+              <a:t>提案⼿法をすべて統合することで、認識性能が⾶躍的に向上しました。</a:t>
+            </a:r>
+            <a:endParaRPr b="0" lang="en-US" sz="2170" spc="-1" strike="noStrike">
+              <a:solidFill>
+                <a:srgbClr val="000000"/>
+              </a:solidFill>
+              <a:latin typeface="Times New Roman"/>
+            </a:endParaRPr>
+          </a:p>
+        </p:txBody>
+      </p:sp>
+      <p:pic>
+        <p:nvPicPr>
+          <p:cNvPr id="378" name="" descr=""/>
+          <p:cNvPicPr/>
+          <p:nvPr/>
+        </p:nvPicPr>
+        <p:blipFill>
+          <a:blip r:embed="rId2"/>
+          <a:stretch/>
+        </p:blipFill>
+        <p:spPr>
+          <a:xfrm>
             <a:off x="533520" y="2171520"/>
             <a:ext cx="4619160" cy="5562360"/>
           </a:xfrm>
@@ -4270,7 +4339,7 @@
       </p:pic>
       <p:sp>
         <p:nvSpPr>
-          <p:cNvPr id="369" name=""/>
+          <p:cNvPr id="379" name=""/>
           <p:cNvSpPr/>
           <p:nvPr/>
         </p:nvSpPr>
@@ -4328,7 +4397,7 @@
       </p:sp>
       <p:sp>
         <p:nvSpPr>
-          <p:cNvPr id="370" name=""/>
+          <p:cNvPr id="380" name=""/>
           <p:cNvSpPr/>
           <p:nvPr/>
         </p:nvSpPr>
@@ -4386,7 +4455,7 @@
       </p:sp>
       <p:sp>
         <p:nvSpPr>
-          <p:cNvPr id="371" name=""/>
+          <p:cNvPr id="381" name=""/>
           <p:cNvSpPr/>
           <p:nvPr/>
         </p:nvSpPr>
@@ -4444,7 +4513,7 @@
       </p:sp>
       <p:sp>
         <p:nvSpPr>
-          <p:cNvPr id="372" name=""/>
+          <p:cNvPr id="382" name=""/>
           <p:cNvSpPr/>
           <p:nvPr/>
         </p:nvSpPr>
@@ -4502,7 +4571,7 @@
       </p:sp>
       <p:sp>
         <p:nvSpPr>
-          <p:cNvPr id="373" name=""/>
+          <p:cNvPr id="383" name=""/>
           <p:cNvSpPr/>
           <p:nvPr/>
         </p:nvSpPr>
@@ -4560,7 +4629,7 @@
       </p:sp>
       <p:sp>
         <p:nvSpPr>
-          <p:cNvPr id="374" name=""/>
+          <p:cNvPr id="384" name=""/>
           <p:cNvSpPr/>
           <p:nvPr/>
         </p:nvSpPr>
@@ -4618,7 +4687,7 @@
       </p:sp>
       <p:sp>
         <p:nvSpPr>
-          <p:cNvPr id="375" name=""/>
+          <p:cNvPr id="385" name=""/>
           <p:cNvSpPr/>
           <p:nvPr/>
         </p:nvSpPr>
@@ -4676,7 +4745,7 @@
       </p:sp>
       <p:sp>
         <p:nvSpPr>
-          <p:cNvPr id="376" name=""/>
+          <p:cNvPr id="386" name=""/>
           <p:cNvSpPr/>
           <p:nvPr/>
         </p:nvSpPr>
@@ -4734,7 +4803,7 @@
       </p:sp>
       <p:sp>
         <p:nvSpPr>
-          <p:cNvPr id="377" name=""/>
+          <p:cNvPr id="387" name=""/>
           <p:cNvSpPr/>
           <p:nvPr/>
         </p:nvSpPr>
@@ -4792,7 +4861,7 @@
       </p:sp>
       <p:sp>
         <p:nvSpPr>
-          <p:cNvPr id="378" name=""/>
+          <p:cNvPr id="388" name=""/>
           <p:cNvSpPr/>
           <p:nvPr/>
         </p:nvSpPr>
@@ -4850,7 +4919,7 @@
       </p:sp>
       <p:sp>
         <p:nvSpPr>
-          <p:cNvPr id="379" name=""/>
+          <p:cNvPr id="389" name=""/>
           <p:cNvSpPr/>
           <p:nvPr/>
         </p:nvSpPr>
@@ -4908,7 +4977,7 @@
       </p:sp>
       <p:sp>
         <p:nvSpPr>
-          <p:cNvPr id="380" name=""/>
+          <p:cNvPr id="390" name=""/>
           <p:cNvSpPr/>
           <p:nvPr/>
         </p:nvSpPr>
@@ -4966,7 +5035,7 @@
       </p:sp>
       <p:sp>
         <p:nvSpPr>
-          <p:cNvPr id="381" name=""/>
+          <p:cNvPr id="391" name=""/>
           <p:cNvSpPr/>
           <p:nvPr/>
         </p:nvSpPr>
@@ -5024,7 +5093,7 @@
       </p:sp>
       <p:sp>
         <p:nvSpPr>
-          <p:cNvPr id="382" name=""/>
+          <p:cNvPr id="392" name=""/>
           <p:cNvSpPr/>
           <p:nvPr/>
         </p:nvSpPr>
@@ -5082,7 +5151,7 @@
       </p:sp>
       <p:sp>
         <p:nvSpPr>
-          <p:cNvPr id="383" name=""/>
+          <p:cNvPr id="393" name=""/>
           <p:cNvSpPr/>
           <p:nvPr/>
         </p:nvSpPr>
@@ -5140,7 +5209,7 @@
       </p:sp>
       <p:sp>
         <p:nvSpPr>
-          <p:cNvPr id="384" name=""/>
+          <p:cNvPr id="394" name=""/>
           <p:cNvSpPr/>
           <p:nvPr/>
         </p:nvSpPr>
@@ -5198,7 +5267,7 @@
       </p:sp>
       <p:sp>
         <p:nvSpPr>
-          <p:cNvPr id="385" name=""/>
+          <p:cNvPr id="395" name=""/>
           <p:cNvSpPr/>
           <p:nvPr/>
         </p:nvSpPr>
@@ -5256,7 +5325,7 @@
       </p:sp>
       <p:sp>
         <p:nvSpPr>
-          <p:cNvPr id="386" name=""/>
+          <p:cNvPr id="396" name=""/>
           <p:cNvSpPr/>
           <p:nvPr/>
         </p:nvSpPr>
@@ -5314,7 +5383,7 @@
       </p:sp>
       <p:sp>
         <p:nvSpPr>
-          <p:cNvPr id="387" name=""/>
+          <p:cNvPr id="397" name=""/>
           <p:cNvSpPr/>
           <p:nvPr/>
         </p:nvSpPr>
@@ -5372,7 +5441,7 @@
       </p:sp>
       <p:sp>
         <p:nvSpPr>
-          <p:cNvPr id="388" name=""/>
+          <p:cNvPr id="398" name=""/>
           <p:cNvSpPr/>
           <p:nvPr/>
         </p:nvSpPr>
@@ -5430,7 +5499,7 @@
       </p:sp>
       <p:sp>
         <p:nvSpPr>
-          <p:cNvPr id="389" name=""/>
+          <p:cNvPr id="399" name=""/>
           <p:cNvSpPr/>
           <p:nvPr/>
         </p:nvSpPr>
@@ -5488,7 +5557,7 @@
       </p:sp>
       <p:sp>
         <p:nvSpPr>
-          <p:cNvPr id="390" name=""/>
+          <p:cNvPr id="400" name=""/>
           <p:cNvSpPr/>
           <p:nvPr/>
         </p:nvSpPr>
@@ -5546,7 +5615,7 @@
       </p:sp>
       <p:sp>
         <p:nvSpPr>
-          <p:cNvPr id="391" name=""/>
+          <p:cNvPr id="401" name=""/>
           <p:cNvSpPr/>
           <p:nvPr/>
         </p:nvSpPr>
@@ -5604,7 +5673,7 @@
       </p:sp>
       <p:sp>
         <p:nvSpPr>
-          <p:cNvPr id="392" name=""/>
+          <p:cNvPr id="402" name=""/>
           <p:cNvSpPr/>
           <p:nvPr/>
         </p:nvSpPr>
@@ -5662,7 +5731,7 @@
       </p:sp>
       <p:sp>
         <p:nvSpPr>
-          <p:cNvPr id="393" name=""/>
+          <p:cNvPr id="403" name=""/>
           <p:cNvSpPr/>
           <p:nvPr/>
         </p:nvSpPr>
@@ -5720,7 +5789,7 @@
       </p:sp>
       <p:sp>
         <p:nvSpPr>
-          <p:cNvPr id="394" name=""/>
+          <p:cNvPr id="404" name=""/>
           <p:cNvSpPr/>
           <p:nvPr/>
         </p:nvSpPr>
@@ -5778,7 +5847,7 @@
       </p:sp>
       <p:sp>
         <p:nvSpPr>
-          <p:cNvPr id="395" name=""/>
+          <p:cNvPr id="405" name=""/>
           <p:cNvSpPr/>
           <p:nvPr/>
         </p:nvSpPr>
@@ -5836,7 +5905,7 @@
       </p:sp>
       <p:sp>
         <p:nvSpPr>
-          <p:cNvPr id="396" name=""/>
+          <p:cNvPr id="406" name=""/>
           <p:cNvSpPr/>
           <p:nvPr/>
         </p:nvSpPr>
@@ -5894,7 +5963,7 @@
       </p:sp>
       <p:sp>
         <p:nvSpPr>
-          <p:cNvPr id="397" name=""/>
+          <p:cNvPr id="407" name=""/>
           <p:cNvSpPr/>
           <p:nvPr/>
         </p:nvSpPr>
@@ -5952,7 +6021,7 @@
       </p:sp>
       <p:sp>
         <p:nvSpPr>
-          <p:cNvPr id="398" name=""/>
+          <p:cNvPr id="408" name=""/>
           <p:cNvSpPr/>
           <p:nvPr/>
         </p:nvSpPr>
@@ -6010,7 +6079,7 @@
       </p:sp>
       <p:sp>
         <p:nvSpPr>
-          <p:cNvPr id="399" name=""/>
+          <p:cNvPr id="409" name=""/>
           <p:cNvSpPr/>
           <p:nvPr/>
         </p:nvSpPr>
@@ -6068,7 +6137,7 @@
       </p:sp>
       <p:sp>
         <p:nvSpPr>
-          <p:cNvPr id="400" name=""/>
+          <p:cNvPr id="410" name=""/>
           <p:cNvSpPr/>
           <p:nvPr/>
         </p:nvSpPr>
@@ -6126,7 +6195,7 @@
       </p:sp>
       <p:sp>
         <p:nvSpPr>
-          <p:cNvPr id="401" name=""/>
+          <p:cNvPr id="411" name=""/>
           <p:cNvSpPr/>
           <p:nvPr/>
         </p:nvSpPr>
@@ -6184,7 +6253,7 @@
       </p:sp>
       <p:sp>
         <p:nvSpPr>
-          <p:cNvPr id="402" name=""/>
+          <p:cNvPr id="412" name=""/>
           <p:cNvSpPr/>
           <p:nvPr/>
         </p:nvSpPr>
@@ -6242,7 +6311,7 @@
       </p:sp>
       <p:sp>
         <p:nvSpPr>
-          <p:cNvPr id="403" name=""/>
+          <p:cNvPr id="413" name=""/>
           <p:cNvSpPr/>
           <p:nvPr/>
         </p:nvSpPr>
@@ -6300,7 +6369,7 @@
       </p:sp>
       <p:sp>
         <p:nvSpPr>
-          <p:cNvPr id="404" name=""/>
+          <p:cNvPr id="414" name=""/>
           <p:cNvSpPr/>
           <p:nvPr/>
         </p:nvSpPr>
@@ -6358,7 +6427,7 @@
       </p:sp>
       <p:sp>
         <p:nvSpPr>
-          <p:cNvPr id="405" name=""/>
+          <p:cNvPr id="415" name=""/>
           <p:cNvSpPr/>
           <p:nvPr/>
         </p:nvSpPr>
@@ -6416,7 +6485,7 @@
       </p:sp>
       <p:sp>
         <p:nvSpPr>
-          <p:cNvPr id="406" name=""/>
+          <p:cNvPr id="416" name=""/>
           <p:cNvSpPr/>
           <p:nvPr/>
         </p:nvSpPr>
@@ -6474,7 +6543,7 @@
       </p:sp>
       <p:sp>
         <p:nvSpPr>
-          <p:cNvPr id="407" name=""/>
+          <p:cNvPr id="417" name=""/>
           <p:cNvSpPr/>
           <p:nvPr/>
         </p:nvSpPr>
@@ -6532,7 +6601,7 @@
       </p:sp>
       <p:sp>
         <p:nvSpPr>
-          <p:cNvPr id="408" name=""/>
+          <p:cNvPr id="418" name=""/>
           <p:cNvSpPr/>
           <p:nvPr/>
         </p:nvSpPr>
@@ -6590,7 +6659,7 @@
       </p:sp>
       <p:sp>
         <p:nvSpPr>
-          <p:cNvPr id="409" name=""/>
+          <p:cNvPr id="419" name=""/>
           <p:cNvSpPr/>
           <p:nvPr/>
         </p:nvSpPr>
@@ -6648,7 +6717,7 @@
       </p:sp>
       <p:sp>
         <p:nvSpPr>
-          <p:cNvPr id="410" name=""/>
+          <p:cNvPr id="420" name=""/>
           <p:cNvSpPr/>
           <p:nvPr/>
         </p:nvSpPr>
@@ -6706,7 +6775,7 @@
       </p:sp>
       <p:sp>
         <p:nvSpPr>
-          <p:cNvPr id="411" name=""/>
+          <p:cNvPr id="421" name=""/>
           <p:cNvSpPr/>
           <p:nvPr/>
         </p:nvSpPr>
@@ -6764,7 +6833,7 @@
       </p:sp>
       <p:sp>
         <p:nvSpPr>
-          <p:cNvPr id="412" name=""/>
+          <p:cNvPr id="422" name=""/>
           <p:cNvSpPr/>
           <p:nvPr/>
         </p:nvSpPr>
@@ -6822,7 +6891,7 @@
       </p:sp>
       <p:sp>
         <p:nvSpPr>
-          <p:cNvPr id="413" name=""/>
+          <p:cNvPr id="423" name=""/>
           <p:cNvSpPr/>
           <p:nvPr/>
         </p:nvSpPr>
@@ -6880,7 +6949,7 @@
       </p:sp>
       <p:sp>
         <p:nvSpPr>
-          <p:cNvPr id="414" name=""/>
+          <p:cNvPr id="424" name=""/>
           <p:cNvSpPr/>
           <p:nvPr/>
         </p:nvSpPr>
@@ -6938,7 +7007,7 @@
       </p:sp>
       <p:sp>
         <p:nvSpPr>
-          <p:cNvPr id="415" name=""/>
+          <p:cNvPr id="425" name=""/>
           <p:cNvSpPr/>
           <p:nvPr/>
         </p:nvSpPr>
@@ -6996,7 +7065,7 @@
       </p:sp>
       <p:sp>
         <p:nvSpPr>
-          <p:cNvPr id="416" name=""/>
+          <p:cNvPr id="426" name=""/>
           <p:cNvSpPr/>
           <p:nvPr/>
         </p:nvSpPr>
@@ -7054,7 +7123,7 @@
       </p:sp>
       <p:sp>
         <p:nvSpPr>
-          <p:cNvPr id="417" name=""/>
+          <p:cNvPr id="427" name=""/>
           <p:cNvSpPr/>
           <p:nvPr/>
         </p:nvSpPr>
@@ -7112,7 +7181,7 @@
       </p:sp>
       <p:sp>
         <p:nvSpPr>
-          <p:cNvPr id="418" name=""/>
+          <p:cNvPr id="428" name=""/>
           <p:cNvSpPr/>
           <p:nvPr/>
         </p:nvSpPr>
@@ -7170,7 +7239,7 @@
       </p:sp>
       <p:sp>
         <p:nvSpPr>
-          <p:cNvPr id="419" name=""/>
+          <p:cNvPr id="429" name=""/>
           <p:cNvSpPr/>
           <p:nvPr/>
         </p:nvSpPr>
@@ -7228,7 +7297,7 @@
       </p:sp>
       <p:sp>
         <p:nvSpPr>
-          <p:cNvPr id="420" name=""/>
+          <p:cNvPr id="430" name=""/>
           <p:cNvSpPr/>
           <p:nvPr/>
         </p:nvSpPr>
@@ -7286,7 +7355,7 @@
       </p:sp>
       <p:sp>
         <p:nvSpPr>
-          <p:cNvPr id="421" name=""/>
+          <p:cNvPr id="431" name=""/>
           <p:cNvSpPr/>
           <p:nvPr/>
         </p:nvSpPr>
@@ -7344,7 +7413,7 @@
       </p:sp>
       <p:sp>
         <p:nvSpPr>
-          <p:cNvPr id="422" name=""/>
+          <p:cNvPr id="432" name=""/>
           <p:cNvSpPr/>
           <p:nvPr/>
         </p:nvSpPr>
@@ -7402,7 +7471,7 @@
       </p:sp>
       <p:sp>
         <p:nvSpPr>
-          <p:cNvPr id="423" name=""/>
+          <p:cNvPr id="433" name=""/>
           <p:cNvSpPr/>
           <p:nvPr/>
         </p:nvSpPr>
@@ -7460,7 +7529,7 @@
       </p:sp>
       <p:sp>
         <p:nvSpPr>
-          <p:cNvPr id="424" name=""/>
+          <p:cNvPr id="434" name=""/>
           <p:cNvSpPr/>
           <p:nvPr/>
         </p:nvSpPr>
@@ -7518,7 +7587,7 @@
       </p:sp>
       <p:sp>
         <p:nvSpPr>
-          <p:cNvPr id="425" name=""/>
+          <p:cNvPr id="435" name=""/>
           <p:cNvSpPr txBox="1"/>
           <p:nvPr/>
         </p:nvSpPr>
@@ -7561,7 +7630,7 @@
       </p:sp>
       <p:sp>
         <p:nvSpPr>
-          <p:cNvPr id="426" name=""/>
+          <p:cNvPr id="436" name=""/>
           <p:cNvSpPr txBox="1"/>
           <p:nvPr/>
         </p:nvSpPr>
@@ -7604,7 +7673,7 @@
       </p:sp>
       <p:sp>
         <p:nvSpPr>
-          <p:cNvPr id="427" name=""/>
+          <p:cNvPr id="437" name=""/>
           <p:cNvSpPr txBox="1"/>
           <p:nvPr/>
         </p:nvSpPr>
@@ -7647,7 +7716,7 @@
       </p:sp>
       <p:sp>
         <p:nvSpPr>
-          <p:cNvPr id="428" name=""/>
+          <p:cNvPr id="438" name=""/>
           <p:cNvSpPr txBox="1"/>
           <p:nvPr/>
         </p:nvSpPr>
@@ -7690,7 +7759,7 @@
       </p:sp>
       <p:sp>
         <p:nvSpPr>
-          <p:cNvPr id="429" name=""/>
+          <p:cNvPr id="439" name=""/>
           <p:cNvSpPr txBox="1"/>
           <p:nvPr/>
         </p:nvSpPr>
@@ -7733,7 +7802,7 @@
       </p:sp>
       <p:sp>
         <p:nvSpPr>
-          <p:cNvPr id="430" name=""/>
+          <p:cNvPr id="440" name=""/>
           <p:cNvSpPr txBox="1"/>
           <p:nvPr/>
         </p:nvSpPr>
@@ -7786,7 +7855,7 @@
       </p:sp>
       <p:sp>
         <p:nvSpPr>
-          <p:cNvPr id="431" name=""/>
+          <p:cNvPr id="441" name=""/>
           <p:cNvSpPr txBox="1"/>
           <p:nvPr/>
         </p:nvSpPr>
@@ -7829,7 +7898,7 @@
       </p:sp>
       <p:sp>
         <p:nvSpPr>
-          <p:cNvPr id="432" name=""/>
+          <p:cNvPr id="442" name=""/>
           <p:cNvSpPr txBox="1"/>
           <p:nvPr/>
         </p:nvSpPr>
@@ -7872,7 +7941,7 @@
       </p:sp>
       <p:sp>
         <p:nvSpPr>
-          <p:cNvPr id="433" name=""/>
+          <p:cNvPr id="443" name=""/>
           <p:cNvSpPr txBox="1"/>
           <p:nvPr/>
         </p:nvSpPr>
@@ -7915,7 +7984,7 @@
       </p:sp>
       <p:sp>
         <p:nvSpPr>
-          <p:cNvPr id="434" name=""/>
+          <p:cNvPr id="444" name=""/>
           <p:cNvSpPr txBox="1"/>
           <p:nvPr/>
         </p:nvSpPr>
@@ -7958,7 +8027,7 @@
       </p:sp>
       <p:sp>
         <p:nvSpPr>
-          <p:cNvPr id="435" name=""/>
+          <p:cNvPr id="445" name=""/>
           <p:cNvSpPr txBox="1"/>
           <p:nvPr/>
         </p:nvSpPr>
@@ -8011,7 +8080,7 @@
       </p:sp>
       <p:sp>
         <p:nvSpPr>
-          <p:cNvPr id="436" name=""/>
+          <p:cNvPr id="446" name=""/>
           <p:cNvSpPr txBox="1"/>
           <p:nvPr/>
         </p:nvSpPr>
@@ -8054,7 +8123,7 @@
       </p:sp>
       <p:sp>
         <p:nvSpPr>
-          <p:cNvPr id="437" name=""/>
+          <p:cNvPr id="447" name=""/>
           <p:cNvSpPr txBox="1"/>
           <p:nvPr/>
         </p:nvSpPr>
@@ -8097,7 +8166,7 @@
       </p:sp>
       <p:sp>
         <p:nvSpPr>
-          <p:cNvPr id="438" name=""/>
+          <p:cNvPr id="448" name=""/>
           <p:cNvSpPr txBox="1"/>
           <p:nvPr/>
         </p:nvSpPr>
@@ -8140,7 +8209,7 @@
       </p:sp>
       <p:sp>
         <p:nvSpPr>
-          <p:cNvPr id="439" name=""/>
+          <p:cNvPr id="449" name=""/>
           <p:cNvSpPr txBox="1"/>
           <p:nvPr/>
         </p:nvSpPr>
@@ -8183,7 +8252,7 @@
       </p:sp>
       <p:sp>
         <p:nvSpPr>
-          <p:cNvPr id="440" name=""/>
+          <p:cNvPr id="450" name=""/>
           <p:cNvSpPr txBox="1"/>
           <p:nvPr/>
         </p:nvSpPr>
@@ -8236,7 +8305,7 @@
       </p:sp>
       <p:sp>
         <p:nvSpPr>
-          <p:cNvPr id="441" name=""/>
+          <p:cNvPr id="451" name=""/>
           <p:cNvSpPr txBox="1"/>
           <p:nvPr/>
         </p:nvSpPr>
@@ -8279,7 +8348,7 @@
       </p:sp>
       <p:sp>
         <p:nvSpPr>
-          <p:cNvPr id="442" name=""/>
+          <p:cNvPr id="452" name=""/>
           <p:cNvSpPr txBox="1"/>
           <p:nvPr/>
         </p:nvSpPr>
@@ -8322,7 +8391,7 @@
       </p:sp>
       <p:sp>
         <p:nvSpPr>
-          <p:cNvPr id="443" name=""/>
+          <p:cNvPr id="453" name=""/>
           <p:cNvSpPr txBox="1"/>
           <p:nvPr/>
         </p:nvSpPr>
@@ -8365,7 +8434,7 @@
       </p:sp>
       <p:sp>
         <p:nvSpPr>
-          <p:cNvPr id="444" name=""/>
+          <p:cNvPr id="454" name=""/>
           <p:cNvSpPr txBox="1"/>
           <p:nvPr/>
         </p:nvSpPr>
@@ -8408,7 +8477,7 @@
       </p:sp>
       <p:sp>
         <p:nvSpPr>
-          <p:cNvPr id="445" name=""/>
+          <p:cNvPr id="455" name=""/>
           <p:cNvSpPr txBox="1"/>
           <p:nvPr/>
         </p:nvSpPr>
@@ -8461,7 +8530,7 @@
       </p:sp>
       <p:sp>
         <p:nvSpPr>
-          <p:cNvPr id="446" name=""/>
+          <p:cNvPr id="456" name=""/>
           <p:cNvSpPr txBox="1"/>
           <p:nvPr/>
         </p:nvSpPr>
@@ -8504,7 +8573,7 @@
       </p:sp>
       <p:sp>
         <p:nvSpPr>
-          <p:cNvPr id="447" name=""/>
+          <p:cNvPr id="457" name=""/>
           <p:cNvSpPr txBox="1"/>
           <p:nvPr/>
         </p:nvSpPr>
@@ -8547,7 +8616,7 @@
       </p:sp>
       <p:sp>
         <p:nvSpPr>
-          <p:cNvPr id="448" name=""/>
+          <p:cNvPr id="458" name=""/>
           <p:cNvSpPr txBox="1"/>
           <p:nvPr/>
         </p:nvSpPr>
@@ -8590,7 +8659,7 @@
       </p:sp>
       <p:sp>
         <p:nvSpPr>
-          <p:cNvPr id="449" name=""/>
+          <p:cNvPr id="459" name=""/>
           <p:cNvSpPr txBox="1"/>
           <p:nvPr/>
         </p:nvSpPr>
@@ -8633,7 +8702,7 @@
       </p:sp>
       <p:sp>
         <p:nvSpPr>
-          <p:cNvPr id="450" name=""/>
+          <p:cNvPr id="460" name=""/>
           <p:cNvSpPr txBox="1"/>
           <p:nvPr/>
         </p:nvSpPr>
@@ -8676,7 +8745,7 @@
       </p:sp>
       <p:sp>
         <p:nvSpPr>
-          <p:cNvPr id="451" name=""/>
+          <p:cNvPr id="461" name=""/>
           <p:cNvSpPr txBox="1"/>
           <p:nvPr/>
         </p:nvSpPr>
@@ -8719,7 +8788,7 @@
       </p:sp>
       <p:sp>
         <p:nvSpPr>
-          <p:cNvPr id="452" name=""/>
+          <p:cNvPr id="462" name=""/>
           <p:cNvSpPr txBox="1"/>
           <p:nvPr/>
         </p:nvSpPr>
@@ -8762,7 +8831,7 @@
       </p:sp>
       <p:sp>
         <p:nvSpPr>
-          <p:cNvPr id="453" name=""/>
+          <p:cNvPr id="463" name=""/>
           <p:cNvSpPr txBox="1"/>
           <p:nvPr/>
         </p:nvSpPr>
@@ -8805,7 +8874,7 @@
       </p:sp>
       <p:sp>
         <p:nvSpPr>
-          <p:cNvPr id="454" name=""/>
+          <p:cNvPr id="464" name=""/>
           <p:cNvSpPr txBox="1"/>
           <p:nvPr/>
         </p:nvSpPr>
@@ -8848,7 +8917,7 @@
       </p:sp>
       <p:sp>
         <p:nvSpPr>
-          <p:cNvPr id="455" name=""/>
+          <p:cNvPr id="465" name=""/>
           <p:cNvSpPr/>
           <p:nvPr/>
         </p:nvSpPr>
@@ -8974,7 +9043,7 @@
       </p:sp>
       <p:sp>
         <p:nvSpPr>
-          <p:cNvPr id="456" name=""/>
+          <p:cNvPr id="466" name=""/>
           <p:cNvSpPr txBox="1"/>
           <p:nvPr/>
         </p:nvSpPr>
@@ -9017,7 +9086,7 @@
       </p:sp>
       <p:sp>
         <p:nvSpPr>
-          <p:cNvPr id="457" name=""/>
+          <p:cNvPr id="467" name=""/>
           <p:cNvSpPr txBox="1"/>
           <p:nvPr/>
         </p:nvSpPr>
@@ -9060,7 +9129,7 @@
       </p:sp>
       <p:sp>
         <p:nvSpPr>
-          <p:cNvPr id="458" name=""/>
+          <p:cNvPr id="468" name=""/>
           <p:cNvSpPr txBox="1"/>
           <p:nvPr/>
         </p:nvSpPr>
@@ -9113,7 +9182,7 @@
       </p:sp>
       <p:sp>
         <p:nvSpPr>
-          <p:cNvPr id="459" name=""/>
+          <p:cNvPr id="469" name=""/>
           <p:cNvSpPr txBox="1"/>
           <p:nvPr/>
         </p:nvSpPr>
@@ -9156,7 +9225,7 @@
       </p:sp>
       <p:sp>
         <p:nvSpPr>
-          <p:cNvPr id="460" name=""/>
+          <p:cNvPr id="470" name=""/>
           <p:cNvSpPr/>
           <p:nvPr/>
         </p:nvSpPr>
@@ -9282,7 +9351,7 @@
       </p:sp>
       <p:sp>
         <p:nvSpPr>
-          <p:cNvPr id="461" name=""/>
+          <p:cNvPr id="471" name=""/>
           <p:cNvSpPr txBox="1"/>
           <p:nvPr/>
         </p:nvSpPr>
@@ -9335,7 +9404,7 @@
       </p:sp>
       <p:sp>
         <p:nvSpPr>
-          <p:cNvPr id="462" name=""/>
+          <p:cNvPr id="472" name=""/>
           <p:cNvSpPr txBox="1"/>
           <p:nvPr/>
         </p:nvSpPr>
@@ -9378,7 +9447,7 @@
       </p:sp>
       <p:sp>
         <p:nvSpPr>
-          <p:cNvPr id="463" name=""/>
+          <p:cNvPr id="473" name=""/>
           <p:cNvSpPr txBox="1"/>
           <p:nvPr/>
         </p:nvSpPr>
@@ -9421,7 +9490,7 @@
       </p:sp>
       <p:sp>
         <p:nvSpPr>
-          <p:cNvPr id="464" name=""/>
+          <p:cNvPr id="474" name=""/>
           <p:cNvSpPr txBox="1"/>
           <p:nvPr/>
         </p:nvSpPr>
@@ -9464,7 +9533,7 @@
       </p:sp>
       <p:sp>
         <p:nvSpPr>
-          <p:cNvPr id="465" name=""/>
+          <p:cNvPr id="475" name=""/>
           <p:cNvSpPr txBox="1"/>
           <p:nvPr/>
         </p:nvSpPr>
@@ -9507,7 +9576,7 @@
       </p:sp>
       <p:sp>
         <p:nvSpPr>
-          <p:cNvPr id="466" name=""/>
+          <p:cNvPr id="476" name=""/>
           <p:cNvSpPr/>
           <p:nvPr/>
         </p:nvSpPr>
@@ -9645,7 +9714,7 @@
       </p:sp>
       <p:sp>
         <p:nvSpPr>
-          <p:cNvPr id="467" name=""/>
+          <p:cNvPr id="477" name=""/>
           <p:cNvSpPr txBox="1"/>
           <p:nvPr/>
         </p:nvSpPr>
@@ -9688,7 +9757,7 @@
       </p:sp>
       <p:sp>
         <p:nvSpPr>
-          <p:cNvPr id="468" name=""/>
+          <p:cNvPr id="478" name=""/>
           <p:cNvSpPr txBox="1"/>
           <p:nvPr/>
         </p:nvSpPr>
@@ -9761,7 +9830,7 @@
       </p:grpSpPr>
       <p:sp>
         <p:nvSpPr>
-          <p:cNvPr id="469" name=""/>
+          <p:cNvPr id="479" name=""/>
           <p:cNvSpPr/>
           <p:nvPr/>
         </p:nvSpPr>
@@ -9819,7 +9888,7 @@
       </p:sp>
       <p:sp>
         <p:nvSpPr>
-          <p:cNvPr id="470" name=""/>
+          <p:cNvPr id="480" name=""/>
           <p:cNvSpPr/>
           <p:nvPr/>
         </p:nvSpPr>
@@ -9877,7 +9946,7 @@
       </p:sp>
       <p:sp>
         <p:nvSpPr>
-          <p:cNvPr id="471" name=""/>
+          <p:cNvPr id="481" name=""/>
           <p:cNvSpPr/>
           <p:nvPr/>
         </p:nvSpPr>
@@ -9935,7 +10004,7 @@
       </p:sp>
       <p:sp>
         <p:nvSpPr>
-          <p:cNvPr id="472" name=""/>
+          <p:cNvPr id="482" name=""/>
           <p:cNvSpPr/>
           <p:nvPr/>
         </p:nvSpPr>
@@ -10151,9 +10220,32 @@
           </a:p>
         </p:txBody>
       </p:sp>
-      <p:sp>
-        <p:nvSpPr>
-          <p:cNvPr id="473" name=""/>
+      <p:pic>
+        <p:nvPicPr>
+          <p:cNvPr id="483" name="" descr=""/>
+          <p:cNvPicPr/>
+          <p:nvPr/>
+        </p:nvPicPr>
+        <p:blipFill>
+          <a:blip r:embed="rId1"/>
+          <a:stretch/>
+        </p:blipFill>
+        <p:spPr>
+          <a:xfrm>
+            <a:off x="10515600" y="38160"/>
+            <a:ext cx="1142640" cy="1142640"/>
+          </a:xfrm>
+          <a:prstGeom prst="rect">
+            <a:avLst/>
+          </a:prstGeom>
+          <a:ln w="0">
+            <a:noFill/>
+          </a:ln>
+        </p:spPr>
+      </p:pic>
+      <p:sp>
+        <p:nvSpPr>
+          <p:cNvPr id="484" name=""/>
           <p:cNvSpPr/>
           <p:nvPr/>
         </p:nvSpPr>
@@ -10279,7 +10371,7 @@
       </p:sp>
       <p:sp>
         <p:nvSpPr>
-          <p:cNvPr id="474" name=""/>
+          <p:cNvPr id="485" name=""/>
           <p:cNvSpPr txBox="1"/>
           <p:nvPr/>
         </p:nvSpPr>
@@ -10322,7 +10414,7 @@
       </p:sp>
       <p:sp>
         <p:nvSpPr>
-          <p:cNvPr id="475" name=""/>
+          <p:cNvPr id="486" name=""/>
           <p:cNvSpPr txBox="1"/>
           <p:nvPr/>
         </p:nvSpPr>
@@ -10365,7 +10457,7 @@
       </p:sp>
       <p:sp>
         <p:nvSpPr>
-          <p:cNvPr id="476" name=""/>
+          <p:cNvPr id="487" name=""/>
           <p:cNvSpPr txBox="1"/>
           <p:nvPr/>
         </p:nvSpPr>
@@ -10408,7 +10500,7 @@
       </p:sp>
       <p:sp>
         <p:nvSpPr>
-          <p:cNvPr id="477" name=""/>
+          <p:cNvPr id="488" name=""/>
           <p:cNvSpPr txBox="1"/>
           <p:nvPr/>
         </p:nvSpPr>
@@ -10451,7 +10543,7 @@
       </p:sp>
       <p:sp>
         <p:nvSpPr>
-          <p:cNvPr id="478" name=""/>
+          <p:cNvPr id="489" name=""/>
           <p:cNvSpPr/>
           <p:nvPr/>
         </p:nvSpPr>
@@ -10577,7 +10669,7 @@
       </p:sp>
       <p:sp>
         <p:nvSpPr>
-          <p:cNvPr id="479" name=""/>
+          <p:cNvPr id="490" name=""/>
           <p:cNvSpPr txBox="1"/>
           <p:nvPr/>
         </p:nvSpPr>
@@ -10620,7 +10712,7 @@
       </p:sp>
       <p:sp>
         <p:nvSpPr>
-          <p:cNvPr id="480" name=""/>
+          <p:cNvPr id="491" name=""/>
           <p:cNvSpPr txBox="1"/>
           <p:nvPr/>
         </p:nvSpPr>
@@ -10663,7 +10755,7 @@
       </p:sp>
       <p:sp>
         <p:nvSpPr>
-          <p:cNvPr id="481" name=""/>
+          <p:cNvPr id="492" name=""/>
           <p:cNvSpPr/>
           <p:nvPr/>
         </p:nvSpPr>
@@ -10790,7 +10882,7 @@
       </p:sp>
       <p:sp>
         <p:nvSpPr>
-          <p:cNvPr id="482" name=""/>
+          <p:cNvPr id="493" name=""/>
           <p:cNvSpPr txBox="1"/>
           <p:nvPr/>
         </p:nvSpPr>
@@ -10833,7 +10925,7 @@
       </p:sp>
       <p:sp>
         <p:nvSpPr>
-          <p:cNvPr id="483" name=""/>
+          <p:cNvPr id="494" name=""/>
           <p:cNvSpPr/>
           <p:nvPr/>
         </p:nvSpPr>
@@ -10960,7 +11052,7 @@
       </p:sp>
       <p:sp>
         <p:nvSpPr>
-          <p:cNvPr id="484" name=""/>
+          <p:cNvPr id="495" name=""/>
           <p:cNvSpPr txBox="1"/>
           <p:nvPr/>
         </p:nvSpPr>
@@ -11003,7 +11095,7 @@
       </p:sp>
       <p:sp>
         <p:nvSpPr>
-          <p:cNvPr id="485" name=""/>
+          <p:cNvPr id="496" name=""/>
           <p:cNvSpPr txBox="1"/>
           <p:nvPr/>
         </p:nvSpPr>
@@ -11056,7 +11148,7 @@
       </p:sp>
       <p:sp>
         <p:nvSpPr>
-          <p:cNvPr id="486" name=""/>
+          <p:cNvPr id="497" name=""/>
           <p:cNvSpPr txBox="1"/>
           <p:nvPr/>
         </p:nvSpPr>
@@ -11099,7 +11191,7 @@
       </p:sp>
       <p:sp>
         <p:nvSpPr>
-          <p:cNvPr id="487" name=""/>
+          <p:cNvPr id="498" name=""/>
           <p:cNvSpPr txBox="1"/>
           <p:nvPr/>
         </p:nvSpPr>
@@ -11142,7 +11234,7 @@
       </p:sp>
       <p:sp>
         <p:nvSpPr>
-          <p:cNvPr id="488" name=""/>
+          <p:cNvPr id="499" name=""/>
           <p:cNvSpPr/>
           <p:nvPr/>
         </p:nvSpPr>
@@ -11269,7 +11361,7 @@
       </p:sp>
       <p:sp>
         <p:nvSpPr>
-          <p:cNvPr id="489" name=""/>
+          <p:cNvPr id="500" name=""/>
           <p:cNvSpPr txBox="1"/>
           <p:nvPr/>
         </p:nvSpPr>
@@ -11312,7 +11404,7 @@
       </p:sp>
       <p:sp>
         <p:nvSpPr>
-          <p:cNvPr id="490" name=""/>
+          <p:cNvPr id="501" name=""/>
           <p:cNvSpPr txBox="1"/>
           <p:nvPr/>
         </p:nvSpPr>
@@ -11395,7 +11487,7 @@
       </p:sp>
       <p:sp>
         <p:nvSpPr>
-          <p:cNvPr id="491" name=""/>
+          <p:cNvPr id="502" name=""/>
           <p:cNvSpPr txBox="1"/>
           <p:nvPr/>
         </p:nvSpPr>
@@ -11438,7 +11530,7 @@
       </p:sp>
       <p:sp>
         <p:nvSpPr>
-          <p:cNvPr id="492" name=""/>
+          <p:cNvPr id="503" name=""/>
           <p:cNvSpPr/>
           <p:nvPr/>
         </p:nvSpPr>
@@ -11576,7 +11668,7 @@
       </p:sp>
       <p:sp>
         <p:nvSpPr>
-          <p:cNvPr id="493" name=""/>
+          <p:cNvPr id="504" name=""/>
           <p:cNvSpPr txBox="1"/>
           <p:nvPr/>
         </p:nvSpPr>
@@ -11619,7 +11711,7 @@
       </p:sp>
       <p:sp>
         <p:nvSpPr>
-          <p:cNvPr id="494" name=""/>
+          <p:cNvPr id="505" name=""/>
           <p:cNvSpPr txBox="1"/>
           <p:nvPr/>
         </p:nvSpPr>
@@ -11692,7 +11784,7 @@
       </p:grpSpPr>
       <p:sp>
         <p:nvSpPr>
-          <p:cNvPr id="495" name=""/>
+          <p:cNvPr id="506" name=""/>
           <p:cNvSpPr/>
           <p:nvPr/>
         </p:nvSpPr>
@@ -11750,7 +11842,7 @@
       </p:sp>
       <p:sp>
         <p:nvSpPr>
-          <p:cNvPr id="496" name=""/>
+          <p:cNvPr id="507" name=""/>
           <p:cNvSpPr/>
           <p:nvPr/>
         </p:nvSpPr>
@@ -11808,7 +11900,7 @@
       </p:sp>
       <p:sp>
         <p:nvSpPr>
-          <p:cNvPr id="497" name=""/>
+          <p:cNvPr id="508" name=""/>
           <p:cNvSpPr/>
           <p:nvPr/>
         </p:nvSpPr>
@@ -11866,7 +11958,7 @@
       </p:sp>
       <p:sp>
         <p:nvSpPr>
-          <p:cNvPr id="498" name=""/>
+          <p:cNvPr id="509" name=""/>
           <p:cNvSpPr/>
           <p:nvPr/>
         </p:nvSpPr>
@@ -12082,9 +12174,32 @@
           </a:p>
         </p:txBody>
       </p:sp>
-      <p:sp>
-        <p:nvSpPr>
-          <p:cNvPr id="499" name=""/>
+      <p:pic>
+        <p:nvPicPr>
+          <p:cNvPr id="510" name="" descr=""/>
+          <p:cNvPicPr/>
+          <p:nvPr/>
+        </p:nvPicPr>
+        <p:blipFill>
+          <a:blip r:embed="rId1"/>
+          <a:stretch/>
+        </p:blipFill>
+        <p:spPr>
+          <a:xfrm>
+            <a:off x="10515600" y="38160"/>
+            <a:ext cx="1142640" cy="1142640"/>
+          </a:xfrm>
+          <a:prstGeom prst="rect">
+            <a:avLst/>
+          </a:prstGeom>
+          <a:ln w="0">
+            <a:noFill/>
+          </a:ln>
+        </p:spPr>
+      </p:pic>
+      <p:sp>
+        <p:nvSpPr>
+          <p:cNvPr id="511" name=""/>
           <p:cNvSpPr/>
           <p:nvPr/>
         </p:nvSpPr>
@@ -12210,7 +12325,7 @@
       </p:sp>
       <p:sp>
         <p:nvSpPr>
-          <p:cNvPr id="500" name=""/>
+          <p:cNvPr id="512" name=""/>
           <p:cNvSpPr txBox="1"/>
           <p:nvPr/>
         </p:nvSpPr>
@@ -12253,7 +12368,7 @@
       </p:sp>
       <p:sp>
         <p:nvSpPr>
-          <p:cNvPr id="501" name=""/>
+          <p:cNvPr id="513" name=""/>
           <p:cNvSpPr/>
           <p:nvPr/>
         </p:nvSpPr>
@@ -12380,7 +12495,7 @@
       </p:sp>
       <p:sp>
         <p:nvSpPr>
-          <p:cNvPr id="502" name=""/>
+          <p:cNvPr id="514" name=""/>
           <p:cNvSpPr txBox="1"/>
           <p:nvPr/>
         </p:nvSpPr>
@@ -12423,7 +12538,7 @@
       </p:sp>
       <p:sp>
         <p:nvSpPr>
-          <p:cNvPr id="503" name=""/>
+          <p:cNvPr id="515" name=""/>
           <p:cNvSpPr txBox="1"/>
           <p:nvPr/>
         </p:nvSpPr>
@@ -12466,7 +12581,7 @@
       </p:sp>
       <p:sp>
         <p:nvSpPr>
-          <p:cNvPr id="504" name=""/>
+          <p:cNvPr id="516" name=""/>
           <p:cNvSpPr/>
           <p:nvPr/>
         </p:nvSpPr>
@@ -12592,7 +12707,7 @@
       </p:sp>
       <p:sp>
         <p:nvSpPr>
-          <p:cNvPr id="505" name=""/>
+          <p:cNvPr id="517" name=""/>
           <p:cNvSpPr txBox="1"/>
           <p:nvPr/>
         </p:nvSpPr>
@@ -12635,7 +12750,7 @@
       </p:sp>
       <p:sp>
         <p:nvSpPr>
-          <p:cNvPr id="506" name=""/>
+          <p:cNvPr id="518" name=""/>
           <p:cNvSpPr/>
           <p:nvPr/>
         </p:nvSpPr>
@@ -12762,7 +12877,7 @@
       </p:sp>
       <p:sp>
         <p:nvSpPr>
-          <p:cNvPr id="507" name=""/>
+          <p:cNvPr id="519" name=""/>
           <p:cNvSpPr txBox="1"/>
           <p:nvPr/>
         </p:nvSpPr>
@@ -12805,7 +12920,7 @@
       </p:sp>
       <p:sp>
         <p:nvSpPr>
-          <p:cNvPr id="508" name=""/>
+          <p:cNvPr id="520" name=""/>
           <p:cNvSpPr txBox="1"/>
           <p:nvPr/>
         </p:nvSpPr>
@@ -12848,7 +12963,7 @@
       </p:sp>
       <p:sp>
         <p:nvSpPr>
-          <p:cNvPr id="509" name=""/>
+          <p:cNvPr id="521" name=""/>
           <p:cNvSpPr/>
           <p:nvPr/>
         </p:nvSpPr>
@@ -12974,7 +13089,7 @@
       </p:sp>
       <p:sp>
         <p:nvSpPr>
-          <p:cNvPr id="510" name=""/>
+          <p:cNvPr id="522" name=""/>
           <p:cNvSpPr txBox="1"/>
           <p:nvPr/>
         </p:nvSpPr>
@@ -13017,7 +13132,7 @@
       </p:sp>
       <p:sp>
         <p:nvSpPr>
-          <p:cNvPr id="511" name=""/>
+          <p:cNvPr id="523" name=""/>
           <p:cNvSpPr/>
           <p:nvPr/>
         </p:nvSpPr>
@@ -13144,7 +13259,7 @@
       </p:sp>
       <p:sp>
         <p:nvSpPr>
-          <p:cNvPr id="512" name=""/>
+          <p:cNvPr id="524" name=""/>
           <p:cNvSpPr txBox="1"/>
           <p:nvPr/>
         </p:nvSpPr>
@@ -13187,7 +13302,7 @@
       </p:sp>
       <p:sp>
         <p:nvSpPr>
-          <p:cNvPr id="513" name=""/>
+          <p:cNvPr id="525" name=""/>
           <p:cNvSpPr txBox="1"/>
           <p:nvPr/>
         </p:nvSpPr>
@@ -13230,7 +13345,7 @@
       </p:sp>
       <p:sp>
         <p:nvSpPr>
-          <p:cNvPr id="514" name=""/>
+          <p:cNvPr id="526" name=""/>
           <p:cNvSpPr txBox="1"/>
           <p:nvPr/>
         </p:nvSpPr>
@@ -13273,7 +13388,7 @@
       </p:sp>
       <p:sp>
         <p:nvSpPr>
-          <p:cNvPr id="515" name=""/>
+          <p:cNvPr id="527" name=""/>
           <p:cNvSpPr/>
           <p:nvPr/>
         </p:nvSpPr>
@@ -13411,7 +13526,7 @@
       </p:sp>
       <p:sp>
         <p:nvSpPr>
-          <p:cNvPr id="516" name=""/>
+          <p:cNvPr id="528" name=""/>
           <p:cNvSpPr txBox="1"/>
           <p:nvPr/>
         </p:nvSpPr>
@@ -13454,7 +13569,7 @@
       </p:sp>
       <p:sp>
         <p:nvSpPr>
-          <p:cNvPr id="517" name=""/>
+          <p:cNvPr id="529" name=""/>
           <p:cNvSpPr txBox="1"/>
           <p:nvPr/>
         </p:nvSpPr>
@@ -13527,7 +13642,7 @@
       </p:grpSpPr>
       <p:sp>
         <p:nvSpPr>
-          <p:cNvPr id="518" name=""/>
+          <p:cNvPr id="530" name=""/>
           <p:cNvSpPr/>
           <p:nvPr/>
         </p:nvSpPr>
@@ -13585,7 +13700,7 @@
       </p:sp>
       <p:sp>
         <p:nvSpPr>
-          <p:cNvPr id="519" name=""/>
+          <p:cNvPr id="531" name=""/>
           <p:cNvSpPr/>
           <p:nvPr/>
         </p:nvSpPr>
@@ -13643,7 +13758,7 @@
       </p:sp>
       <p:sp>
         <p:nvSpPr>
-          <p:cNvPr id="520" name=""/>
+          <p:cNvPr id="532" name=""/>
           <p:cNvSpPr/>
           <p:nvPr/>
         </p:nvSpPr>
@@ -13701,7 +13816,7 @@
       </p:sp>
       <p:sp>
         <p:nvSpPr>
-          <p:cNvPr id="521" name=""/>
+          <p:cNvPr id="533" name=""/>
           <p:cNvSpPr/>
           <p:nvPr/>
         </p:nvSpPr>
@@ -13917,9 +14032,32 @@
           </a:p>
         </p:txBody>
       </p:sp>
-      <p:sp>
-        <p:nvSpPr>
-          <p:cNvPr id="522" name=""/>
+      <p:pic>
+        <p:nvPicPr>
+          <p:cNvPr id="534" name="" descr=""/>
+          <p:cNvPicPr/>
+          <p:nvPr/>
+        </p:nvPicPr>
+        <p:blipFill>
+          <a:blip r:embed="rId1"/>
+          <a:stretch/>
+        </p:blipFill>
+        <p:spPr>
+          <a:xfrm>
+            <a:off x="10515600" y="38160"/>
+            <a:ext cx="1142640" cy="1142640"/>
+          </a:xfrm>
+          <a:prstGeom prst="rect">
+            <a:avLst/>
+          </a:prstGeom>
+          <a:ln w="0">
+            <a:noFill/>
+          </a:ln>
+        </p:spPr>
+      </p:pic>
+      <p:sp>
+        <p:nvSpPr>
+          <p:cNvPr id="535" name=""/>
           <p:cNvSpPr txBox="1"/>
           <p:nvPr/>
         </p:nvSpPr>
@@ -13962,7 +14100,7 @@
       </p:sp>
       <p:sp>
         <p:nvSpPr>
-          <p:cNvPr id="523" name=""/>
+          <p:cNvPr id="536" name=""/>
           <p:cNvSpPr txBox="1"/>
           <p:nvPr/>
         </p:nvSpPr>
@@ -14005,7 +14143,7 @@
       </p:sp>
       <p:sp>
         <p:nvSpPr>
-          <p:cNvPr id="524" name=""/>
+          <p:cNvPr id="537" name=""/>
           <p:cNvSpPr txBox="1"/>
           <p:nvPr/>
         </p:nvSpPr>
@@ -14048,7 +14186,7 @@
       </p:sp>
       <p:sp>
         <p:nvSpPr>
-          <p:cNvPr id="525" name=""/>
+          <p:cNvPr id="538" name=""/>
           <p:cNvSpPr txBox="1"/>
           <p:nvPr/>
         </p:nvSpPr>
@@ -14091,7 +14229,7 @@
       </p:sp>
       <p:sp>
         <p:nvSpPr>
-          <p:cNvPr id="526" name=""/>
+          <p:cNvPr id="539" name=""/>
           <p:cNvSpPr txBox="1"/>
           <p:nvPr/>
         </p:nvSpPr>
@@ -14134,7 +14272,7 @@
       </p:sp>
       <p:sp>
         <p:nvSpPr>
-          <p:cNvPr id="527" name=""/>
+          <p:cNvPr id="540" name=""/>
           <p:cNvSpPr txBox="1"/>
           <p:nvPr/>
         </p:nvSpPr>
@@ -14177,7 +14315,7 @@
       </p:sp>
       <p:sp>
         <p:nvSpPr>
-          <p:cNvPr id="528" name=""/>
+          <p:cNvPr id="541" name=""/>
           <p:cNvSpPr/>
           <p:nvPr/>
         </p:nvSpPr>
@@ -14304,7 +14442,7 @@
       </p:sp>
       <p:sp>
         <p:nvSpPr>
-          <p:cNvPr id="529" name=""/>
+          <p:cNvPr id="542" name=""/>
           <p:cNvSpPr txBox="1"/>
           <p:nvPr/>
         </p:nvSpPr>
@@ -14347,7 +14485,7 @@
       </p:sp>
       <p:sp>
         <p:nvSpPr>
-          <p:cNvPr id="530" name=""/>
+          <p:cNvPr id="543" name=""/>
           <p:cNvSpPr txBox="1"/>
           <p:nvPr/>
         </p:nvSpPr>
@@ -14390,7 +14528,7 @@
       </p:sp>
       <p:sp>
         <p:nvSpPr>
-          <p:cNvPr id="531" name=""/>
+          <p:cNvPr id="544" name=""/>
           <p:cNvSpPr txBox="1"/>
           <p:nvPr/>
         </p:nvSpPr>
@@ -14433,7 +14571,7 @@
       </p:sp>
       <p:sp>
         <p:nvSpPr>
-          <p:cNvPr id="532" name=""/>
+          <p:cNvPr id="545" name=""/>
           <p:cNvSpPr txBox="1"/>
           <p:nvPr/>
         </p:nvSpPr>
@@ -14476,7 +14614,7 @@
       </p:sp>
       <p:sp>
         <p:nvSpPr>
-          <p:cNvPr id="533" name=""/>
+          <p:cNvPr id="546" name=""/>
           <p:cNvSpPr txBox="1"/>
           <p:nvPr/>
         </p:nvSpPr>
@@ -14519,7 +14657,7 @@
       </p:sp>
       <p:sp>
         <p:nvSpPr>
-          <p:cNvPr id="534" name=""/>
+          <p:cNvPr id="547" name=""/>
           <p:cNvSpPr txBox="1"/>
           <p:nvPr/>
         </p:nvSpPr>
@@ -14562,7 +14700,7 @@
       </p:sp>
       <p:sp>
         <p:nvSpPr>
-          <p:cNvPr id="535" name=""/>
+          <p:cNvPr id="548" name=""/>
           <p:cNvSpPr txBox="1"/>
           <p:nvPr/>
         </p:nvSpPr>
@@ -14605,7 +14743,7 @@
       </p:sp>
       <p:sp>
         <p:nvSpPr>
-          <p:cNvPr id="536" name=""/>
+          <p:cNvPr id="549" name=""/>
           <p:cNvSpPr txBox="1"/>
           <p:nvPr/>
         </p:nvSpPr>
@@ -14648,7 +14786,7 @@
       </p:sp>
       <p:sp>
         <p:nvSpPr>
-          <p:cNvPr id="537" name=""/>
+          <p:cNvPr id="550" name=""/>
           <p:cNvSpPr txBox="1"/>
           <p:nvPr/>
         </p:nvSpPr>
@@ -14691,7 +14829,7 @@
       </p:sp>
       <p:sp>
         <p:nvSpPr>
-          <p:cNvPr id="538" name=""/>
+          <p:cNvPr id="551" name=""/>
           <p:cNvSpPr txBox="1"/>
           <p:nvPr/>
         </p:nvSpPr>
@@ -14734,7 +14872,7 @@
       </p:sp>
       <p:sp>
         <p:nvSpPr>
-          <p:cNvPr id="539" name=""/>
+          <p:cNvPr id="552" name=""/>
           <p:cNvSpPr txBox="1"/>
           <p:nvPr/>
         </p:nvSpPr>
@@ -14777,7 +14915,7 @@
       </p:sp>
       <p:sp>
         <p:nvSpPr>
-          <p:cNvPr id="540" name=""/>
+          <p:cNvPr id="553" name=""/>
           <p:cNvSpPr txBox="1"/>
           <p:nvPr/>
         </p:nvSpPr>
@@ -14820,7 +14958,7 @@
       </p:sp>
       <p:sp>
         <p:nvSpPr>
-          <p:cNvPr id="541" name=""/>
+          <p:cNvPr id="554" name=""/>
           <p:cNvSpPr/>
           <p:nvPr/>
         </p:nvSpPr>
@@ -14947,7 +15085,7 @@
       </p:sp>
       <p:sp>
         <p:nvSpPr>
-          <p:cNvPr id="542" name=""/>
+          <p:cNvPr id="555" name=""/>
           <p:cNvSpPr txBox="1"/>
           <p:nvPr/>
         </p:nvSpPr>
@@ -14990,7 +15128,7 @@
       </p:sp>
       <p:sp>
         <p:nvSpPr>
-          <p:cNvPr id="543" name=""/>
+          <p:cNvPr id="556" name=""/>
           <p:cNvSpPr txBox="1"/>
           <p:nvPr/>
         </p:nvSpPr>
@@ -15033,7 +15171,7 @@
       </p:sp>
       <p:sp>
         <p:nvSpPr>
-          <p:cNvPr id="544" name=""/>
+          <p:cNvPr id="557" name=""/>
           <p:cNvSpPr txBox="1"/>
           <p:nvPr/>
         </p:nvSpPr>
@@ -15076,7 +15214,7 @@
       </p:sp>
       <p:sp>
         <p:nvSpPr>
-          <p:cNvPr id="545" name=""/>
+          <p:cNvPr id="558" name=""/>
           <p:cNvSpPr txBox="1"/>
           <p:nvPr/>
         </p:nvSpPr>
@@ -15119,7 +15257,7 @@
       </p:sp>
       <p:sp>
         <p:nvSpPr>
-          <p:cNvPr id="546" name=""/>
+          <p:cNvPr id="559" name=""/>
           <p:cNvSpPr/>
           <p:nvPr/>
         </p:nvSpPr>
@@ -15246,7 +15384,7 @@
       </p:sp>
       <p:sp>
         <p:nvSpPr>
-          <p:cNvPr id="547" name=""/>
+          <p:cNvPr id="560" name=""/>
           <p:cNvSpPr txBox="1"/>
           <p:nvPr/>
         </p:nvSpPr>
@@ -15289,7 +15427,7 @@
       </p:sp>
       <p:sp>
         <p:nvSpPr>
-          <p:cNvPr id="548" name=""/>
+          <p:cNvPr id="561" name=""/>
           <p:cNvSpPr txBox="1"/>
           <p:nvPr/>
         </p:nvSpPr>
@@ -15342,7 +15480,7 @@
       </p:sp>
       <p:sp>
         <p:nvSpPr>
-          <p:cNvPr id="549" name=""/>
+          <p:cNvPr id="562" name=""/>
           <p:cNvSpPr txBox="1"/>
           <p:nvPr/>
         </p:nvSpPr>
@@ -15385,7 +15523,7 @@
       </p:sp>
       <p:sp>
         <p:nvSpPr>
-          <p:cNvPr id="550" name=""/>
+          <p:cNvPr id="563" name=""/>
           <p:cNvSpPr/>
           <p:nvPr/>
         </p:nvSpPr>
@@ -15512,7 +15650,7 @@
       </p:sp>
       <p:sp>
         <p:nvSpPr>
-          <p:cNvPr id="551" name=""/>
+          <p:cNvPr id="564" name=""/>
           <p:cNvSpPr txBox="1"/>
           <p:nvPr/>
         </p:nvSpPr>
@@ -15565,7 +15703,7 @@
       </p:sp>
       <p:sp>
         <p:nvSpPr>
-          <p:cNvPr id="552" name=""/>
+          <p:cNvPr id="565" name=""/>
           <p:cNvSpPr txBox="1"/>
           <p:nvPr/>
         </p:nvSpPr>
@@ -15618,7 +15756,7 @@
       </p:sp>
       <p:sp>
         <p:nvSpPr>
-          <p:cNvPr id="553" name=""/>
+          <p:cNvPr id="566" name=""/>
           <p:cNvSpPr txBox="1"/>
           <p:nvPr/>
         </p:nvSpPr>
@@ -15661,7 +15799,7 @@
       </p:sp>
       <p:sp>
         <p:nvSpPr>
-          <p:cNvPr id="554" name=""/>
+          <p:cNvPr id="567" name=""/>
           <p:cNvSpPr txBox="1"/>
           <p:nvPr/>
         </p:nvSpPr>
@@ -15704,7 +15842,7 @@
       </p:sp>
       <p:sp>
         <p:nvSpPr>
-          <p:cNvPr id="555" name=""/>
+          <p:cNvPr id="568" name=""/>
           <p:cNvSpPr txBox="1"/>
           <p:nvPr/>
         </p:nvSpPr>
@@ -15747,7 +15885,7 @@
       </p:sp>
       <p:sp>
         <p:nvSpPr>
-          <p:cNvPr id="556" name=""/>
+          <p:cNvPr id="569" name=""/>
           <p:cNvSpPr/>
           <p:nvPr/>
         </p:nvSpPr>
@@ -15885,7 +16023,7 @@
       </p:sp>
       <p:sp>
         <p:nvSpPr>
-          <p:cNvPr id="557" name=""/>
+          <p:cNvPr id="570" name=""/>
           <p:cNvSpPr txBox="1"/>
           <p:nvPr/>
         </p:nvSpPr>
@@ -15928,7 +16066,7 @@
       </p:sp>
       <p:sp>
         <p:nvSpPr>
-          <p:cNvPr id="558" name=""/>
+          <p:cNvPr id="571" name=""/>
           <p:cNvSpPr txBox="1"/>
           <p:nvPr/>
         </p:nvSpPr>
@@ -16001,7 +16139,7 @@
       </p:grpSpPr>
       <p:sp>
         <p:nvSpPr>
-          <p:cNvPr id="15" name=""/>
+          <p:cNvPr id="16" name=""/>
           <p:cNvSpPr/>
           <p:nvPr/>
         </p:nvSpPr>
@@ -16059,7 +16197,7 @@
       </p:sp>
       <p:sp>
         <p:nvSpPr>
-          <p:cNvPr id="16" name=""/>
+          <p:cNvPr id="17" name=""/>
           <p:cNvSpPr/>
           <p:nvPr/>
         </p:nvSpPr>
@@ -16117,7 +16255,7 @@
       </p:sp>
       <p:sp>
         <p:nvSpPr>
-          <p:cNvPr id="17" name=""/>
+          <p:cNvPr id="18" name=""/>
           <p:cNvSpPr/>
           <p:nvPr/>
         </p:nvSpPr>
@@ -16175,7 +16313,7 @@
       </p:sp>
       <p:sp>
         <p:nvSpPr>
-          <p:cNvPr id="18" name=""/>
+          <p:cNvPr id="19" name=""/>
           <p:cNvSpPr txBox="1"/>
           <p:nvPr/>
         </p:nvSpPr>
@@ -16218,7 +16356,7 @@
       </p:sp>
       <p:sp>
         <p:nvSpPr>
-          <p:cNvPr id="19" name=""/>
+          <p:cNvPr id="20" name=""/>
           <p:cNvSpPr txBox="1"/>
           <p:nvPr/>
         </p:nvSpPr>
@@ -16261,7 +16399,7 @@
       </p:sp>
       <p:sp>
         <p:nvSpPr>
-          <p:cNvPr id="20" name=""/>
+          <p:cNvPr id="21" name=""/>
           <p:cNvSpPr txBox="1"/>
           <p:nvPr/>
         </p:nvSpPr>
@@ -16304,7 +16442,7 @@
       </p:sp>
       <p:sp>
         <p:nvSpPr>
-          <p:cNvPr id="21" name=""/>
+          <p:cNvPr id="22" name=""/>
           <p:cNvSpPr txBox="1"/>
           <p:nvPr/>
         </p:nvSpPr>
@@ -16347,7 +16485,7 @@
       </p:sp>
       <p:sp>
         <p:nvSpPr>
-          <p:cNvPr id="22" name=""/>
+          <p:cNvPr id="23" name=""/>
           <p:cNvSpPr txBox="1"/>
           <p:nvPr/>
         </p:nvSpPr>
@@ -16390,7 +16528,7 @@
       </p:sp>
       <p:sp>
         <p:nvSpPr>
-          <p:cNvPr id="23" name=""/>
+          <p:cNvPr id="24" name=""/>
           <p:cNvSpPr txBox="1"/>
           <p:nvPr/>
         </p:nvSpPr>
@@ -16433,7 +16571,7 @@
       </p:sp>
       <p:sp>
         <p:nvSpPr>
-          <p:cNvPr id="24" name=""/>
+          <p:cNvPr id="25" name=""/>
           <p:cNvSpPr txBox="1"/>
           <p:nvPr/>
         </p:nvSpPr>
@@ -16476,7 +16614,7 @@
       </p:sp>
       <p:sp>
         <p:nvSpPr>
-          <p:cNvPr id="25" name=""/>
+          <p:cNvPr id="26" name=""/>
           <p:cNvSpPr txBox="1"/>
           <p:nvPr/>
         </p:nvSpPr>
@@ -16519,7 +16657,7 @@
       </p:sp>
       <p:sp>
         <p:nvSpPr>
-          <p:cNvPr id="26" name=""/>
+          <p:cNvPr id="27" name=""/>
           <p:cNvSpPr txBox="1"/>
           <p:nvPr/>
         </p:nvSpPr>
@@ -16562,7 +16700,7 @@
       </p:sp>
       <p:sp>
         <p:nvSpPr>
-          <p:cNvPr id="27" name=""/>
+          <p:cNvPr id="28" name=""/>
           <p:cNvSpPr txBox="1"/>
           <p:nvPr/>
         </p:nvSpPr>
@@ -16605,7 +16743,7 @@
       </p:sp>
       <p:sp>
         <p:nvSpPr>
-          <p:cNvPr id="28" name=""/>
+          <p:cNvPr id="29" name=""/>
           <p:cNvSpPr/>
           <p:nvPr/>
         </p:nvSpPr>
@@ -16661,9 +16799,32 @@
           </a:p>
         </p:txBody>
       </p:sp>
-      <p:sp>
-        <p:nvSpPr>
-          <p:cNvPr id="29" name=""/>
+      <p:pic>
+        <p:nvPicPr>
+          <p:cNvPr id="30" name="" descr=""/>
+          <p:cNvPicPr/>
+          <p:nvPr/>
+        </p:nvPicPr>
+        <p:blipFill>
+          <a:blip r:embed="rId1"/>
+          <a:stretch/>
+        </p:blipFill>
+        <p:spPr>
+          <a:xfrm>
+            <a:off x="10744200" y="-219240"/>
+            <a:ext cx="1256760" cy="1256760"/>
+          </a:xfrm>
+          <a:prstGeom prst="rect">
+            <a:avLst/>
+          </a:prstGeom>
+          <a:ln w="0">
+            <a:noFill/>
+          </a:ln>
+        </p:spPr>
+      </p:pic>
+      <p:sp>
+        <p:nvSpPr>
+          <p:cNvPr id="31" name=""/>
           <p:cNvSpPr/>
           <p:nvPr/>
         </p:nvSpPr>
@@ -16721,7 +16882,7 @@
       </p:sp>
       <p:sp>
         <p:nvSpPr>
-          <p:cNvPr id="30" name=""/>
+          <p:cNvPr id="32" name=""/>
           <p:cNvSpPr/>
           <p:nvPr/>
         </p:nvSpPr>
@@ -16779,7 +16940,7 @@
       </p:sp>
       <p:sp>
         <p:nvSpPr>
-          <p:cNvPr id="31" name=""/>
+          <p:cNvPr id="33" name=""/>
           <p:cNvSpPr/>
           <p:nvPr/>
         </p:nvSpPr>
@@ -16837,7 +16998,7 @@
       </p:sp>
       <p:sp>
         <p:nvSpPr>
-          <p:cNvPr id="32" name=""/>
+          <p:cNvPr id="34" name=""/>
           <p:cNvSpPr/>
           <p:nvPr/>
         </p:nvSpPr>
@@ -16895,7 +17056,7 @@
       </p:sp>
       <p:sp>
         <p:nvSpPr>
-          <p:cNvPr id="33" name=""/>
+          <p:cNvPr id="35" name=""/>
           <p:cNvSpPr/>
           <p:nvPr/>
         </p:nvSpPr>
@@ -16953,7 +17114,7 @@
       </p:sp>
       <p:sp>
         <p:nvSpPr>
-          <p:cNvPr id="34" name=""/>
+          <p:cNvPr id="36" name=""/>
           <p:cNvSpPr txBox="1"/>
           <p:nvPr/>
         </p:nvSpPr>
@@ -16996,7 +17157,7 @@
       </p:sp>
       <p:sp>
         <p:nvSpPr>
-          <p:cNvPr id="35" name=""/>
+          <p:cNvPr id="37" name=""/>
           <p:cNvSpPr txBox="1"/>
           <p:nvPr/>
         </p:nvSpPr>
@@ -17069,7 +17230,7 @@
       </p:grpSpPr>
       <p:sp>
         <p:nvSpPr>
-          <p:cNvPr id="36" name=""/>
+          <p:cNvPr id="38" name=""/>
           <p:cNvSpPr/>
           <p:nvPr/>
         </p:nvSpPr>
@@ -17127,7 +17288,7 @@
       </p:sp>
       <p:sp>
         <p:nvSpPr>
-          <p:cNvPr id="37" name=""/>
+          <p:cNvPr id="39" name=""/>
           <p:cNvSpPr/>
           <p:nvPr/>
         </p:nvSpPr>
@@ -17185,7 +17346,7 @@
       </p:sp>
       <p:sp>
         <p:nvSpPr>
-          <p:cNvPr id="38" name=""/>
+          <p:cNvPr id="40" name=""/>
           <p:cNvSpPr/>
           <p:nvPr/>
         </p:nvSpPr>
@@ -17243,7 +17404,7 @@
       </p:sp>
       <p:sp>
         <p:nvSpPr>
-          <p:cNvPr id="39" name=""/>
+          <p:cNvPr id="41" name=""/>
           <p:cNvSpPr/>
           <p:nvPr/>
         </p:nvSpPr>
@@ -17459,9 +17620,32 @@
           </a:p>
         </p:txBody>
       </p:sp>
-      <p:sp>
-        <p:nvSpPr>
-          <p:cNvPr id="40" name=""/>
+      <p:pic>
+        <p:nvPicPr>
+          <p:cNvPr id="42" name="" descr=""/>
+          <p:cNvPicPr/>
+          <p:nvPr/>
+        </p:nvPicPr>
+        <p:blipFill>
+          <a:blip r:embed="rId1"/>
+          <a:stretch/>
+        </p:blipFill>
+        <p:spPr>
+          <a:xfrm>
+            <a:off x="10515600" y="38160"/>
+            <a:ext cx="1142640" cy="1142640"/>
+          </a:xfrm>
+          <a:prstGeom prst="rect">
+            <a:avLst/>
+          </a:prstGeom>
+          <a:ln w="0">
+            <a:noFill/>
+          </a:ln>
+        </p:spPr>
+      </p:pic>
+      <p:sp>
+        <p:nvSpPr>
+          <p:cNvPr id="43" name=""/>
           <p:cNvSpPr/>
           <p:nvPr/>
         </p:nvSpPr>
@@ -17587,7 +17771,7 @@
       </p:sp>
       <p:sp>
         <p:nvSpPr>
-          <p:cNvPr id="41" name=""/>
+          <p:cNvPr id="44" name=""/>
           <p:cNvSpPr txBox="1"/>
           <p:nvPr/>
         </p:nvSpPr>
@@ -17630,7 +17814,7 @@
       </p:sp>
       <p:sp>
         <p:nvSpPr>
-          <p:cNvPr id="42" name=""/>
+          <p:cNvPr id="45" name=""/>
           <p:cNvSpPr txBox="1"/>
           <p:nvPr/>
         </p:nvSpPr>
@@ -17673,7 +17857,7 @@
       </p:sp>
       <p:sp>
         <p:nvSpPr>
-          <p:cNvPr id="43" name=""/>
+          <p:cNvPr id="46" name=""/>
           <p:cNvSpPr txBox="1"/>
           <p:nvPr/>
         </p:nvSpPr>
@@ -17716,7 +17900,7 @@
       </p:sp>
       <p:sp>
         <p:nvSpPr>
-          <p:cNvPr id="44" name=""/>
+          <p:cNvPr id="47" name=""/>
           <p:cNvSpPr/>
           <p:nvPr/>
         </p:nvSpPr>
@@ -17842,7 +18026,7 @@
       </p:sp>
       <p:sp>
         <p:nvSpPr>
-          <p:cNvPr id="45" name=""/>
+          <p:cNvPr id="48" name=""/>
           <p:cNvSpPr txBox="1"/>
           <p:nvPr/>
         </p:nvSpPr>
@@ -17885,7 +18069,7 @@
       </p:sp>
       <p:sp>
         <p:nvSpPr>
-          <p:cNvPr id="46" name=""/>
+          <p:cNvPr id="49" name=""/>
           <p:cNvSpPr txBox="1"/>
           <p:nvPr/>
         </p:nvSpPr>
@@ -17928,7 +18112,7 @@
       </p:sp>
       <p:sp>
         <p:nvSpPr>
-          <p:cNvPr id="47" name=""/>
+          <p:cNvPr id="50" name=""/>
           <p:cNvSpPr txBox="1"/>
           <p:nvPr/>
         </p:nvSpPr>
@@ -17971,7 +18155,7 @@
       </p:sp>
       <p:sp>
         <p:nvSpPr>
-          <p:cNvPr id="48" name=""/>
+          <p:cNvPr id="51" name=""/>
           <p:cNvSpPr txBox="1"/>
           <p:nvPr/>
         </p:nvSpPr>
@@ -18014,7 +18198,7 @@
       </p:sp>
       <p:sp>
         <p:nvSpPr>
-          <p:cNvPr id="49" name=""/>
+          <p:cNvPr id="52" name=""/>
           <p:cNvSpPr txBox="1"/>
           <p:nvPr/>
         </p:nvSpPr>
@@ -18057,7 +18241,7 @@
       </p:sp>
       <p:sp>
         <p:nvSpPr>
-          <p:cNvPr id="50" name=""/>
+          <p:cNvPr id="53" name=""/>
           <p:cNvSpPr txBox="1"/>
           <p:nvPr/>
         </p:nvSpPr>
@@ -18100,7 +18284,7 @@
       </p:sp>
       <p:sp>
         <p:nvSpPr>
-          <p:cNvPr id="51" name=""/>
+          <p:cNvPr id="54" name=""/>
           <p:cNvSpPr txBox="1"/>
           <p:nvPr/>
         </p:nvSpPr>
@@ -18143,7 +18327,7 @@
       </p:sp>
       <p:sp>
         <p:nvSpPr>
-          <p:cNvPr id="52" name=""/>
+          <p:cNvPr id="55" name=""/>
           <p:cNvSpPr txBox="1"/>
           <p:nvPr/>
         </p:nvSpPr>
@@ -18186,7 +18370,7 @@
       </p:sp>
       <p:sp>
         <p:nvSpPr>
-          <p:cNvPr id="53" name=""/>
+          <p:cNvPr id="56" name=""/>
           <p:cNvSpPr/>
           <p:nvPr/>
         </p:nvSpPr>
@@ -18312,7 +18496,7 @@
       </p:sp>
       <p:sp>
         <p:nvSpPr>
-          <p:cNvPr id="54" name=""/>
+          <p:cNvPr id="57" name=""/>
           <p:cNvSpPr txBox="1"/>
           <p:nvPr/>
         </p:nvSpPr>
@@ -18355,7 +18539,7 @@
       </p:sp>
       <p:sp>
         <p:nvSpPr>
-          <p:cNvPr id="55" name=""/>
+          <p:cNvPr id="58" name=""/>
           <p:cNvSpPr txBox="1"/>
           <p:nvPr/>
         </p:nvSpPr>
@@ -18398,7 +18582,7 @@
       </p:sp>
       <p:sp>
         <p:nvSpPr>
-          <p:cNvPr id="56" name=""/>
+          <p:cNvPr id="59" name=""/>
           <p:cNvSpPr txBox="1"/>
           <p:nvPr/>
         </p:nvSpPr>
@@ -18441,7 +18625,7 @@
       </p:sp>
       <p:sp>
         <p:nvSpPr>
-          <p:cNvPr id="57" name=""/>
+          <p:cNvPr id="60" name=""/>
           <p:cNvSpPr/>
           <p:nvPr/>
         </p:nvSpPr>
@@ -18519,7 +18703,7 @@
       </p:sp>
       <p:sp>
         <p:nvSpPr>
-          <p:cNvPr id="58" name=""/>
+          <p:cNvPr id="61" name=""/>
           <p:cNvSpPr/>
           <p:nvPr/>
         </p:nvSpPr>
@@ -18586,7 +18770,7 @@
       </p:sp>
       <p:sp>
         <p:nvSpPr>
-          <p:cNvPr id="59" name=""/>
+          <p:cNvPr id="62" name=""/>
           <p:cNvSpPr txBox="1"/>
           <p:nvPr/>
         </p:nvSpPr>
@@ -18629,7 +18813,7 @@
       </p:sp>
       <p:sp>
         <p:nvSpPr>
-          <p:cNvPr id="60" name=""/>
+          <p:cNvPr id="63" name=""/>
           <p:cNvSpPr txBox="1"/>
           <p:nvPr/>
         </p:nvSpPr>
@@ -18672,7 +18856,7 @@
       </p:sp>
       <p:sp>
         <p:nvSpPr>
-          <p:cNvPr id="61" name=""/>
+          <p:cNvPr id="64" name=""/>
           <p:cNvSpPr txBox="1"/>
           <p:nvPr/>
         </p:nvSpPr>
@@ -18715,7 +18899,7 @@
       </p:sp>
       <p:sp>
         <p:nvSpPr>
-          <p:cNvPr id="62" name=""/>
+          <p:cNvPr id="65" name=""/>
           <p:cNvSpPr txBox="1"/>
           <p:nvPr/>
         </p:nvSpPr>
@@ -18758,7 +18942,7 @@
       </p:sp>
       <p:sp>
         <p:nvSpPr>
-          <p:cNvPr id="63" name=""/>
+          <p:cNvPr id="66" name=""/>
           <p:cNvSpPr txBox="1"/>
           <p:nvPr/>
         </p:nvSpPr>
@@ -18801,7 +18985,7 @@
       </p:sp>
       <p:sp>
         <p:nvSpPr>
-          <p:cNvPr id="64" name=""/>
+          <p:cNvPr id="67" name=""/>
           <p:cNvSpPr txBox="1"/>
           <p:nvPr/>
         </p:nvSpPr>
@@ -18844,7 +19028,7 @@
       </p:sp>
       <p:sp>
         <p:nvSpPr>
-          <p:cNvPr id="65" name=""/>
+          <p:cNvPr id="68" name=""/>
           <p:cNvSpPr txBox="1"/>
           <p:nvPr/>
         </p:nvSpPr>
@@ -18887,7 +19071,7 @@
       </p:sp>
       <p:sp>
         <p:nvSpPr>
-          <p:cNvPr id="66" name=""/>
+          <p:cNvPr id="69" name=""/>
           <p:cNvSpPr txBox="1"/>
           <p:nvPr/>
         </p:nvSpPr>
@@ -18930,7 +19114,7 @@
       </p:sp>
       <p:sp>
         <p:nvSpPr>
-          <p:cNvPr id="67" name=""/>
+          <p:cNvPr id="70" name=""/>
           <p:cNvSpPr txBox="1"/>
           <p:nvPr/>
         </p:nvSpPr>
@@ -18973,7 +19157,7 @@
       </p:sp>
       <p:sp>
         <p:nvSpPr>
-          <p:cNvPr id="68" name=""/>
+          <p:cNvPr id="71" name=""/>
           <p:cNvSpPr txBox="1"/>
           <p:nvPr/>
         </p:nvSpPr>
@@ -19016,7 +19200,7 @@
       </p:sp>
       <p:sp>
         <p:nvSpPr>
-          <p:cNvPr id="69" name=""/>
+          <p:cNvPr id="72" name=""/>
           <p:cNvSpPr txBox="1"/>
           <p:nvPr/>
         </p:nvSpPr>
@@ -19059,7 +19243,7 @@
       </p:sp>
       <p:sp>
         <p:nvSpPr>
-          <p:cNvPr id="70" name=""/>
+          <p:cNvPr id="73" name=""/>
           <p:cNvSpPr txBox="1"/>
           <p:nvPr/>
         </p:nvSpPr>
@@ -19102,7 +19286,7 @@
       </p:sp>
       <p:sp>
         <p:nvSpPr>
-          <p:cNvPr id="71" name=""/>
+          <p:cNvPr id="74" name=""/>
           <p:cNvSpPr txBox="1"/>
           <p:nvPr/>
         </p:nvSpPr>
@@ -19145,7 +19329,7 @@
       </p:sp>
       <p:sp>
         <p:nvSpPr>
-          <p:cNvPr id="72" name=""/>
+          <p:cNvPr id="75" name=""/>
           <p:cNvSpPr/>
           <p:nvPr/>
         </p:nvSpPr>
@@ -19283,7 +19467,7 @@
       </p:sp>
       <p:sp>
         <p:nvSpPr>
-          <p:cNvPr id="73" name=""/>
+          <p:cNvPr id="76" name=""/>
           <p:cNvSpPr txBox="1"/>
           <p:nvPr/>
         </p:nvSpPr>
@@ -19326,7 +19510,7 @@
       </p:sp>
       <p:sp>
         <p:nvSpPr>
-          <p:cNvPr id="74" name=""/>
+          <p:cNvPr id="77" name=""/>
           <p:cNvSpPr txBox="1"/>
           <p:nvPr/>
         </p:nvSpPr>
@@ -19399,7 +19583,7 @@
       </p:grpSpPr>
       <p:sp>
         <p:nvSpPr>
-          <p:cNvPr id="75" name=""/>
+          <p:cNvPr id="78" name=""/>
           <p:cNvSpPr/>
           <p:nvPr/>
         </p:nvSpPr>
@@ -19457,7 +19641,7 @@
       </p:sp>
       <p:sp>
         <p:nvSpPr>
-          <p:cNvPr id="76" name=""/>
+          <p:cNvPr id="79" name=""/>
           <p:cNvSpPr/>
           <p:nvPr/>
         </p:nvSpPr>
@@ -19515,7 +19699,7 @@
       </p:sp>
       <p:sp>
         <p:nvSpPr>
-          <p:cNvPr id="77" name=""/>
+          <p:cNvPr id="80" name=""/>
           <p:cNvSpPr/>
           <p:nvPr/>
         </p:nvSpPr>
@@ -19573,7 +19757,7 @@
       </p:sp>
       <p:sp>
         <p:nvSpPr>
-          <p:cNvPr id="78" name=""/>
+          <p:cNvPr id="81" name=""/>
           <p:cNvSpPr/>
           <p:nvPr/>
         </p:nvSpPr>
@@ -19789,9 +19973,32 @@
           </a:p>
         </p:txBody>
       </p:sp>
-      <p:sp>
-        <p:nvSpPr>
-          <p:cNvPr id="79" name=""/>
+      <p:pic>
+        <p:nvPicPr>
+          <p:cNvPr id="82" name="" descr=""/>
+          <p:cNvPicPr/>
+          <p:nvPr/>
+        </p:nvPicPr>
+        <p:blipFill>
+          <a:blip r:embed="rId1"/>
+          <a:stretch/>
+        </p:blipFill>
+        <p:spPr>
+          <a:xfrm>
+            <a:off x="10515600" y="38160"/>
+            <a:ext cx="1142640" cy="1142640"/>
+          </a:xfrm>
+          <a:prstGeom prst="rect">
+            <a:avLst/>
+          </a:prstGeom>
+          <a:ln w="0">
+            <a:noFill/>
+          </a:ln>
+        </p:spPr>
+      </p:pic>
+      <p:sp>
+        <p:nvSpPr>
+          <p:cNvPr id="83" name=""/>
           <p:cNvSpPr txBox="1"/>
           <p:nvPr/>
         </p:nvSpPr>
@@ -19834,7 +20041,7 @@
       </p:sp>
       <p:sp>
         <p:nvSpPr>
-          <p:cNvPr id="80" name=""/>
+          <p:cNvPr id="84" name=""/>
           <p:cNvSpPr txBox="1"/>
           <p:nvPr/>
         </p:nvSpPr>
@@ -19877,7 +20084,7 @@
       </p:sp>
       <p:sp>
         <p:nvSpPr>
-          <p:cNvPr id="81" name=""/>
+          <p:cNvPr id="85" name=""/>
           <p:cNvSpPr txBox="1"/>
           <p:nvPr/>
         </p:nvSpPr>
@@ -19920,7 +20127,7 @@
       </p:sp>
       <p:sp>
         <p:nvSpPr>
-          <p:cNvPr id="82" name=""/>
+          <p:cNvPr id="86" name=""/>
           <p:cNvSpPr txBox="1"/>
           <p:nvPr/>
         </p:nvSpPr>
@@ -19963,7 +20170,7 @@
       </p:sp>
       <p:sp>
         <p:nvSpPr>
-          <p:cNvPr id="83" name=""/>
+          <p:cNvPr id="87" name=""/>
           <p:cNvSpPr txBox="1"/>
           <p:nvPr/>
         </p:nvSpPr>
@@ -20006,7 +20213,7 @@
       </p:sp>
       <p:sp>
         <p:nvSpPr>
-          <p:cNvPr id="84" name=""/>
+          <p:cNvPr id="88" name=""/>
           <p:cNvSpPr/>
           <p:nvPr/>
         </p:nvSpPr>
@@ -20133,7 +20340,7 @@
       </p:sp>
       <p:sp>
         <p:nvSpPr>
-          <p:cNvPr id="85" name=""/>
+          <p:cNvPr id="89" name=""/>
           <p:cNvSpPr txBox="1"/>
           <p:nvPr/>
         </p:nvSpPr>
@@ -20176,7 +20383,7 @@
       </p:sp>
       <p:sp>
         <p:nvSpPr>
-          <p:cNvPr id="86" name=""/>
+          <p:cNvPr id="90" name=""/>
           <p:cNvSpPr txBox="1"/>
           <p:nvPr/>
         </p:nvSpPr>
@@ -20219,7 +20426,7 @@
       </p:sp>
       <p:sp>
         <p:nvSpPr>
-          <p:cNvPr id="87" name=""/>
+          <p:cNvPr id="91" name=""/>
           <p:cNvSpPr txBox="1"/>
           <p:nvPr/>
         </p:nvSpPr>
@@ -20262,7 +20469,7 @@
       </p:sp>
       <p:sp>
         <p:nvSpPr>
-          <p:cNvPr id="88" name=""/>
+          <p:cNvPr id="92" name=""/>
           <p:cNvSpPr/>
           <p:nvPr/>
         </p:nvSpPr>
@@ -20389,7 +20596,7 @@
       </p:sp>
       <p:sp>
         <p:nvSpPr>
-          <p:cNvPr id="89" name=""/>
+          <p:cNvPr id="93" name=""/>
           <p:cNvSpPr txBox="1"/>
           <p:nvPr/>
         </p:nvSpPr>
@@ -20432,7 +20639,7 @@
       </p:sp>
       <p:sp>
         <p:nvSpPr>
-          <p:cNvPr id="90" name=""/>
+          <p:cNvPr id="94" name=""/>
           <p:cNvSpPr txBox="1"/>
           <p:nvPr/>
         </p:nvSpPr>
@@ -20475,7 +20682,7 @@
       </p:sp>
       <p:sp>
         <p:nvSpPr>
-          <p:cNvPr id="91" name=""/>
+          <p:cNvPr id="95" name=""/>
           <p:cNvSpPr txBox="1"/>
           <p:nvPr/>
         </p:nvSpPr>
@@ -20518,7 +20725,7 @@
       </p:sp>
       <p:sp>
         <p:nvSpPr>
-          <p:cNvPr id="92" name=""/>
+          <p:cNvPr id="96" name=""/>
           <p:cNvSpPr txBox="1"/>
           <p:nvPr/>
         </p:nvSpPr>
@@ -20561,7 +20768,7 @@
       </p:sp>
       <p:sp>
         <p:nvSpPr>
-          <p:cNvPr id="93" name=""/>
+          <p:cNvPr id="97" name=""/>
           <p:cNvSpPr txBox="1"/>
           <p:nvPr/>
         </p:nvSpPr>
@@ -20604,7 +20811,7 @@
       </p:sp>
       <p:sp>
         <p:nvSpPr>
-          <p:cNvPr id="94" name=""/>
+          <p:cNvPr id="98" name=""/>
           <p:cNvSpPr/>
           <p:nvPr/>
         </p:nvSpPr>
@@ -20731,7 +20938,7 @@
       </p:sp>
       <p:sp>
         <p:nvSpPr>
-          <p:cNvPr id="95" name=""/>
+          <p:cNvPr id="99" name=""/>
           <p:cNvSpPr txBox="1"/>
           <p:nvPr/>
         </p:nvSpPr>
@@ -20774,7 +20981,7 @@
       </p:sp>
       <p:sp>
         <p:nvSpPr>
-          <p:cNvPr id="96" name=""/>
+          <p:cNvPr id="100" name=""/>
           <p:cNvSpPr txBox="1"/>
           <p:nvPr/>
         </p:nvSpPr>
@@ -20817,7 +21024,7 @@
       </p:sp>
       <p:sp>
         <p:nvSpPr>
-          <p:cNvPr id="97" name=""/>
+          <p:cNvPr id="101" name=""/>
           <p:cNvSpPr txBox="1"/>
           <p:nvPr/>
         </p:nvSpPr>
@@ -20860,7 +21067,7 @@
       </p:sp>
       <p:sp>
         <p:nvSpPr>
-          <p:cNvPr id="98" name=""/>
+          <p:cNvPr id="102" name=""/>
           <p:cNvSpPr/>
           <p:nvPr/>
         </p:nvSpPr>
@@ -20987,7 +21194,7 @@
       </p:sp>
       <p:sp>
         <p:nvSpPr>
-          <p:cNvPr id="99" name=""/>
+          <p:cNvPr id="103" name=""/>
           <p:cNvSpPr txBox="1"/>
           <p:nvPr/>
         </p:nvSpPr>
@@ -21030,7 +21237,7 @@
       </p:sp>
       <p:sp>
         <p:nvSpPr>
-          <p:cNvPr id="100" name=""/>
+          <p:cNvPr id="104" name=""/>
           <p:cNvSpPr txBox="1"/>
           <p:nvPr/>
         </p:nvSpPr>
@@ -21073,7 +21280,7 @@
       </p:sp>
       <p:sp>
         <p:nvSpPr>
-          <p:cNvPr id="101" name=""/>
+          <p:cNvPr id="105" name=""/>
           <p:cNvSpPr txBox="1"/>
           <p:nvPr/>
         </p:nvSpPr>
@@ -21116,7 +21323,7 @@
       </p:sp>
       <p:sp>
         <p:nvSpPr>
-          <p:cNvPr id="102" name=""/>
+          <p:cNvPr id="106" name=""/>
           <p:cNvSpPr txBox="1"/>
           <p:nvPr/>
         </p:nvSpPr>
@@ -21159,7 +21366,7 @@
       </p:sp>
       <p:sp>
         <p:nvSpPr>
-          <p:cNvPr id="103" name=""/>
+          <p:cNvPr id="107" name=""/>
           <p:cNvSpPr txBox="1"/>
           <p:nvPr/>
         </p:nvSpPr>
@@ -21202,7 +21409,7 @@
       </p:sp>
       <p:sp>
         <p:nvSpPr>
-          <p:cNvPr id="104" name=""/>
+          <p:cNvPr id="108" name=""/>
           <p:cNvSpPr/>
           <p:nvPr/>
         </p:nvSpPr>
@@ -21329,7 +21536,7 @@
       </p:sp>
       <p:sp>
         <p:nvSpPr>
-          <p:cNvPr id="105" name=""/>
+          <p:cNvPr id="109" name=""/>
           <p:cNvSpPr txBox="1"/>
           <p:nvPr/>
         </p:nvSpPr>
@@ -21372,7 +21579,7 @@
       </p:sp>
       <p:sp>
         <p:nvSpPr>
-          <p:cNvPr id="106" name=""/>
+          <p:cNvPr id="110" name=""/>
           <p:cNvSpPr txBox="1"/>
           <p:nvPr/>
         </p:nvSpPr>
@@ -21415,7 +21622,7 @@
       </p:sp>
       <p:sp>
         <p:nvSpPr>
-          <p:cNvPr id="107" name=""/>
+          <p:cNvPr id="111" name=""/>
           <p:cNvSpPr txBox="1"/>
           <p:nvPr/>
         </p:nvSpPr>
@@ -21458,7 +21665,7 @@
       </p:sp>
       <p:sp>
         <p:nvSpPr>
-          <p:cNvPr id="108" name=""/>
+          <p:cNvPr id="112" name=""/>
           <p:cNvSpPr/>
           <p:nvPr/>
         </p:nvSpPr>
@@ -21585,7 +21792,7 @@
       </p:sp>
       <p:sp>
         <p:nvSpPr>
-          <p:cNvPr id="109" name=""/>
+          <p:cNvPr id="113" name=""/>
           <p:cNvSpPr txBox="1"/>
           <p:nvPr/>
         </p:nvSpPr>
@@ -21628,7 +21835,7 @@
       </p:sp>
       <p:sp>
         <p:nvSpPr>
-          <p:cNvPr id="110" name=""/>
+          <p:cNvPr id="114" name=""/>
           <p:cNvSpPr txBox="1"/>
           <p:nvPr/>
         </p:nvSpPr>
@@ -21671,7 +21878,7 @@
       </p:sp>
       <p:sp>
         <p:nvSpPr>
-          <p:cNvPr id="111" name=""/>
+          <p:cNvPr id="115" name=""/>
           <p:cNvSpPr txBox="1"/>
           <p:nvPr/>
         </p:nvSpPr>
@@ -21714,7 +21921,7 @@
       </p:sp>
       <p:sp>
         <p:nvSpPr>
-          <p:cNvPr id="112" name=""/>
+          <p:cNvPr id="116" name=""/>
           <p:cNvSpPr txBox="1"/>
           <p:nvPr/>
         </p:nvSpPr>
@@ -21757,7 +21964,7 @@
       </p:sp>
       <p:sp>
         <p:nvSpPr>
-          <p:cNvPr id="113" name=""/>
+          <p:cNvPr id="117" name=""/>
           <p:cNvSpPr txBox="1"/>
           <p:nvPr/>
         </p:nvSpPr>
@@ -21800,7 +22007,7 @@
       </p:sp>
       <p:sp>
         <p:nvSpPr>
-          <p:cNvPr id="114" name=""/>
+          <p:cNvPr id="118" name=""/>
           <p:cNvSpPr txBox="1"/>
           <p:nvPr/>
         </p:nvSpPr>
@@ -21843,7 +22050,7 @@
       </p:sp>
       <p:sp>
         <p:nvSpPr>
-          <p:cNvPr id="115" name=""/>
+          <p:cNvPr id="119" name=""/>
           <p:cNvSpPr/>
           <p:nvPr/>
         </p:nvSpPr>
@@ -21981,7 +22188,7 @@
       </p:sp>
       <p:sp>
         <p:nvSpPr>
-          <p:cNvPr id="116" name=""/>
+          <p:cNvPr id="120" name=""/>
           <p:cNvSpPr txBox="1"/>
           <p:nvPr/>
         </p:nvSpPr>
@@ -22024,7 +22231,7 @@
       </p:sp>
       <p:sp>
         <p:nvSpPr>
-          <p:cNvPr id="117" name=""/>
+          <p:cNvPr id="121" name=""/>
           <p:cNvSpPr txBox="1"/>
           <p:nvPr/>
         </p:nvSpPr>
@@ -22097,7 +22304,7 @@
       </p:grpSpPr>
       <p:sp>
         <p:nvSpPr>
-          <p:cNvPr id="118" name=""/>
+          <p:cNvPr id="122" name=""/>
           <p:cNvSpPr/>
           <p:nvPr/>
         </p:nvSpPr>
@@ -22155,7 +22362,7 @@
       </p:sp>
       <p:sp>
         <p:nvSpPr>
-          <p:cNvPr id="119" name=""/>
+          <p:cNvPr id="123" name=""/>
           <p:cNvSpPr/>
           <p:nvPr/>
         </p:nvSpPr>
@@ -22213,7 +22420,7 @@
       </p:sp>
       <p:sp>
         <p:nvSpPr>
-          <p:cNvPr id="120" name=""/>
+          <p:cNvPr id="124" name=""/>
           <p:cNvSpPr/>
           <p:nvPr/>
         </p:nvSpPr>
@@ -22271,7 +22478,7 @@
       </p:sp>
       <p:sp>
         <p:nvSpPr>
-          <p:cNvPr id="121" name=""/>
+          <p:cNvPr id="125" name=""/>
           <p:cNvSpPr/>
           <p:nvPr/>
         </p:nvSpPr>
@@ -22487,9 +22694,32 @@
           </a:p>
         </p:txBody>
       </p:sp>
-      <p:sp>
-        <p:nvSpPr>
-          <p:cNvPr id="122" name=""/>
+      <p:pic>
+        <p:nvPicPr>
+          <p:cNvPr id="126" name="" descr=""/>
+          <p:cNvPicPr/>
+          <p:nvPr/>
+        </p:nvPicPr>
+        <p:blipFill>
+          <a:blip r:embed="rId1"/>
+          <a:stretch/>
+        </p:blipFill>
+        <p:spPr>
+          <a:xfrm>
+            <a:off x="10515600" y="38160"/>
+            <a:ext cx="1142640" cy="1142640"/>
+          </a:xfrm>
+          <a:prstGeom prst="rect">
+            <a:avLst/>
+          </a:prstGeom>
+          <a:ln w="0">
+            <a:noFill/>
+          </a:ln>
+        </p:spPr>
+      </p:pic>
+      <p:sp>
+        <p:nvSpPr>
+          <p:cNvPr id="127" name=""/>
           <p:cNvSpPr txBox="1"/>
           <p:nvPr/>
         </p:nvSpPr>
@@ -22532,7 +22762,7 @@
       </p:sp>
       <p:sp>
         <p:nvSpPr>
-          <p:cNvPr id="123" name=""/>
+          <p:cNvPr id="128" name=""/>
           <p:cNvSpPr txBox="1"/>
           <p:nvPr/>
         </p:nvSpPr>
@@ -22575,7 +22805,7 @@
       </p:sp>
       <p:sp>
         <p:nvSpPr>
-          <p:cNvPr id="124" name=""/>
+          <p:cNvPr id="129" name=""/>
           <p:cNvSpPr txBox="1"/>
           <p:nvPr/>
         </p:nvSpPr>
@@ -22618,7 +22848,7 @@
       </p:sp>
       <p:sp>
         <p:nvSpPr>
-          <p:cNvPr id="125" name=""/>
+          <p:cNvPr id="130" name=""/>
           <p:cNvSpPr txBox="1"/>
           <p:nvPr/>
         </p:nvSpPr>
@@ -22661,7 +22891,7 @@
       </p:sp>
       <p:sp>
         <p:nvSpPr>
-          <p:cNvPr id="126" name=""/>
+          <p:cNvPr id="131" name=""/>
           <p:cNvSpPr txBox="1"/>
           <p:nvPr/>
         </p:nvSpPr>
@@ -22704,7 +22934,7 @@
       </p:sp>
       <p:sp>
         <p:nvSpPr>
-          <p:cNvPr id="127" name=""/>
+          <p:cNvPr id="132" name=""/>
           <p:cNvSpPr txBox="1"/>
           <p:nvPr/>
         </p:nvSpPr>
@@ -22747,7 +22977,7 @@
       </p:sp>
       <p:sp>
         <p:nvSpPr>
-          <p:cNvPr id="128" name=""/>
+          <p:cNvPr id="133" name=""/>
           <p:cNvSpPr txBox="1"/>
           <p:nvPr/>
         </p:nvSpPr>
@@ -22790,7 +23020,7 @@
       </p:sp>
       <p:sp>
         <p:nvSpPr>
-          <p:cNvPr id="129" name=""/>
+          <p:cNvPr id="134" name=""/>
           <p:cNvSpPr txBox="1"/>
           <p:nvPr/>
         </p:nvSpPr>
@@ -22833,7 +23063,7 @@
       </p:sp>
       <p:sp>
         <p:nvSpPr>
-          <p:cNvPr id="130" name=""/>
+          <p:cNvPr id="135" name=""/>
           <p:cNvSpPr txBox="1"/>
           <p:nvPr/>
         </p:nvSpPr>
@@ -22876,7 +23106,7 @@
       </p:sp>
       <p:sp>
         <p:nvSpPr>
-          <p:cNvPr id="131" name=""/>
+          <p:cNvPr id="136" name=""/>
           <p:cNvSpPr txBox="1"/>
           <p:nvPr/>
         </p:nvSpPr>
@@ -22919,7 +23149,7 @@
       </p:sp>
       <p:sp>
         <p:nvSpPr>
-          <p:cNvPr id="132" name=""/>
+          <p:cNvPr id="137" name=""/>
           <p:cNvSpPr txBox="1"/>
           <p:nvPr/>
         </p:nvSpPr>
@@ -22962,7 +23192,7 @@
       </p:sp>
       <p:sp>
         <p:nvSpPr>
-          <p:cNvPr id="133" name=""/>
+          <p:cNvPr id="138" name=""/>
           <p:cNvSpPr txBox="1"/>
           <p:nvPr/>
         </p:nvSpPr>
@@ -23005,7 +23235,7 @@
       </p:sp>
       <p:sp>
         <p:nvSpPr>
-          <p:cNvPr id="134" name=""/>
+          <p:cNvPr id="139" name=""/>
           <p:cNvSpPr txBox="1"/>
           <p:nvPr/>
         </p:nvSpPr>
@@ -23048,7 +23278,7 @@
       </p:sp>
       <p:sp>
         <p:nvSpPr>
-          <p:cNvPr id="135" name=""/>
+          <p:cNvPr id="140" name=""/>
           <p:cNvSpPr txBox="1"/>
           <p:nvPr/>
         </p:nvSpPr>
@@ -23091,7 +23321,7 @@
       </p:sp>
       <p:sp>
         <p:nvSpPr>
-          <p:cNvPr id="136" name=""/>
+          <p:cNvPr id="141" name=""/>
           <p:cNvSpPr txBox="1"/>
           <p:nvPr/>
         </p:nvSpPr>
@@ -23134,7 +23364,7 @@
       </p:sp>
       <p:sp>
         <p:nvSpPr>
-          <p:cNvPr id="137" name=""/>
+          <p:cNvPr id="142" name=""/>
           <p:cNvSpPr txBox="1"/>
           <p:nvPr/>
         </p:nvSpPr>
@@ -23177,7 +23407,7 @@
       </p:sp>
       <p:sp>
         <p:nvSpPr>
-          <p:cNvPr id="138" name=""/>
+          <p:cNvPr id="143" name=""/>
           <p:cNvSpPr txBox="1"/>
           <p:nvPr/>
         </p:nvSpPr>
@@ -23220,7 +23450,7 @@
       </p:sp>
       <p:sp>
         <p:nvSpPr>
-          <p:cNvPr id="139" name=""/>
+          <p:cNvPr id="144" name=""/>
           <p:cNvSpPr txBox="1"/>
           <p:nvPr/>
         </p:nvSpPr>
@@ -23263,7 +23493,7 @@
       </p:sp>
       <p:sp>
         <p:nvSpPr>
-          <p:cNvPr id="140" name=""/>
+          <p:cNvPr id="145" name=""/>
           <p:cNvSpPr txBox="1"/>
           <p:nvPr/>
         </p:nvSpPr>
@@ -23306,7 +23536,7 @@
       </p:sp>
       <p:sp>
         <p:nvSpPr>
-          <p:cNvPr id="141" name=""/>
+          <p:cNvPr id="146" name=""/>
           <p:cNvSpPr txBox="1"/>
           <p:nvPr/>
         </p:nvSpPr>
@@ -23349,7 +23579,7 @@
       </p:sp>
       <p:sp>
         <p:nvSpPr>
-          <p:cNvPr id="142" name=""/>
+          <p:cNvPr id="147" name=""/>
           <p:cNvSpPr txBox="1"/>
           <p:nvPr/>
         </p:nvSpPr>
@@ -23392,7 +23622,7 @@
       </p:sp>
       <p:sp>
         <p:nvSpPr>
-          <p:cNvPr id="143" name=""/>
+          <p:cNvPr id="148" name=""/>
           <p:cNvSpPr txBox="1"/>
           <p:nvPr/>
         </p:nvSpPr>
@@ -23435,50 +23665,7 @@
       </p:sp>
       <p:sp>
         <p:nvSpPr>
-          <p:cNvPr id="144" name=""/>
-          <p:cNvSpPr txBox="1"/>
-          <p:nvPr/>
-        </p:nvSpPr>
-        <p:spPr>
-          <a:xfrm>
-            <a:off x="7425360" y="4884120"/>
-            <a:ext cx="275760" cy="308160"/>
-          </a:xfrm>
-          <a:prstGeom prst="rect">
-            <a:avLst/>
-          </a:prstGeom>
-          <a:noFill/>
-          <a:ln w="0">
-            <a:noFill/>
-          </a:ln>
-        </p:spPr>
-        <p:txBody>
-          <a:bodyPr wrap="none" lIns="0" rIns="0" tIns="0" bIns="0" anchor="t">
-            <a:noAutofit/>
-          </a:bodyPr>
-          <a:p>
-            <a:r>
-              <a:rPr b="0" lang="en-US" sz="2170" spc="-1" strike="noStrike">
-                <a:solidFill>
-                  <a:srgbClr val="111111"/>
-                </a:solidFill>
-                <a:latin typeface="Arial"/>
-                <a:ea typeface="Arial"/>
-              </a:rPr>
-              <a:t>C</a:t>
-            </a:r>
-            <a:endParaRPr b="0" lang="en-US" sz="2170" spc="-1" strike="noStrike">
-              <a:solidFill>
-                <a:srgbClr val="000000"/>
-              </a:solidFill>
-              <a:latin typeface="Times New Roman"/>
-            </a:endParaRPr>
-          </a:p>
-        </p:txBody>
-      </p:sp>
-      <p:sp>
-        <p:nvSpPr>
-          <p:cNvPr id="145" name=""/>
+          <p:cNvPr id="149" name=""/>
           <p:cNvSpPr txBox="1"/>
           <p:nvPr/>
         </p:nvSpPr>
@@ -23521,7 +23708,7 @@
       </p:sp>
       <p:sp>
         <p:nvSpPr>
-          <p:cNvPr id="146" name=""/>
+          <p:cNvPr id="150" name=""/>
           <p:cNvSpPr/>
           <p:nvPr/>
         </p:nvSpPr>
@@ -23659,7 +23846,7 @@
       </p:sp>
       <p:sp>
         <p:nvSpPr>
-          <p:cNvPr id="147" name=""/>
+          <p:cNvPr id="151" name=""/>
           <p:cNvSpPr txBox="1"/>
           <p:nvPr/>
         </p:nvSpPr>
@@ -23702,7 +23889,7 @@
       </p:sp>
       <p:sp>
         <p:nvSpPr>
-          <p:cNvPr id="148" name=""/>
+          <p:cNvPr id="152" name=""/>
           <p:cNvSpPr txBox="1"/>
           <p:nvPr/>
         </p:nvSpPr>
@@ -23775,7 +23962,7 @@
       </p:grpSpPr>
       <p:sp>
         <p:nvSpPr>
-          <p:cNvPr id="149" name=""/>
+          <p:cNvPr id="153" name=""/>
           <p:cNvSpPr/>
           <p:nvPr/>
         </p:nvSpPr>
@@ -23833,7 +24020,7 @@
       </p:sp>
       <p:sp>
         <p:nvSpPr>
-          <p:cNvPr id="150" name=""/>
+          <p:cNvPr id="154" name=""/>
           <p:cNvSpPr/>
           <p:nvPr/>
         </p:nvSpPr>
@@ -23891,7 +24078,7 @@
       </p:sp>
       <p:sp>
         <p:nvSpPr>
-          <p:cNvPr id="151" name=""/>
+          <p:cNvPr id="155" name=""/>
           <p:cNvSpPr/>
           <p:nvPr/>
         </p:nvSpPr>
@@ -23949,7 +24136,7 @@
       </p:sp>
       <p:sp>
         <p:nvSpPr>
-          <p:cNvPr id="152" name=""/>
+          <p:cNvPr id="156" name=""/>
           <p:cNvSpPr/>
           <p:nvPr/>
         </p:nvSpPr>
@@ -24165,9 +24352,32 @@
           </a:p>
         </p:txBody>
       </p:sp>
-      <p:sp>
-        <p:nvSpPr>
-          <p:cNvPr id="153" name=""/>
+      <p:pic>
+        <p:nvPicPr>
+          <p:cNvPr id="157" name="" descr=""/>
+          <p:cNvPicPr/>
+          <p:nvPr/>
+        </p:nvPicPr>
+        <p:blipFill>
+          <a:blip r:embed="rId1"/>
+          <a:stretch/>
+        </p:blipFill>
+        <p:spPr>
+          <a:xfrm>
+            <a:off x="10515600" y="38160"/>
+            <a:ext cx="1142640" cy="1142640"/>
+          </a:xfrm>
+          <a:prstGeom prst="rect">
+            <a:avLst/>
+          </a:prstGeom>
+          <a:ln w="0">
+            <a:noFill/>
+          </a:ln>
+        </p:spPr>
+      </p:pic>
+      <p:sp>
+        <p:nvSpPr>
+          <p:cNvPr id="158" name=""/>
           <p:cNvSpPr txBox="1"/>
           <p:nvPr/>
         </p:nvSpPr>
@@ -24210,7 +24420,7 @@
       </p:sp>
       <p:sp>
         <p:nvSpPr>
-          <p:cNvPr id="154" name=""/>
+          <p:cNvPr id="159" name=""/>
           <p:cNvSpPr txBox="1"/>
           <p:nvPr/>
         </p:nvSpPr>
@@ -24253,7 +24463,7 @@
       </p:sp>
       <p:sp>
         <p:nvSpPr>
-          <p:cNvPr id="155" name=""/>
+          <p:cNvPr id="160" name=""/>
           <p:cNvSpPr/>
           <p:nvPr/>
         </p:nvSpPr>
@@ -24379,7 +24589,7 @@
       </p:sp>
       <p:sp>
         <p:nvSpPr>
-          <p:cNvPr id="156" name=""/>
+          <p:cNvPr id="161" name=""/>
           <p:cNvSpPr txBox="1"/>
           <p:nvPr/>
         </p:nvSpPr>
@@ -24422,7 +24632,7 @@
       </p:sp>
       <p:sp>
         <p:nvSpPr>
-          <p:cNvPr id="157" name=""/>
+          <p:cNvPr id="162" name=""/>
           <p:cNvSpPr txBox="1"/>
           <p:nvPr/>
         </p:nvSpPr>
@@ -24465,7 +24675,7 @@
       </p:sp>
       <p:sp>
         <p:nvSpPr>
-          <p:cNvPr id="158" name=""/>
+          <p:cNvPr id="163" name=""/>
           <p:cNvSpPr txBox="1"/>
           <p:nvPr/>
         </p:nvSpPr>
@@ -24508,7 +24718,7 @@
       </p:sp>
       <p:sp>
         <p:nvSpPr>
-          <p:cNvPr id="159" name=""/>
+          <p:cNvPr id="164" name=""/>
           <p:cNvSpPr txBox="1"/>
           <p:nvPr/>
         </p:nvSpPr>
@@ -24551,7 +24761,7 @@
       </p:sp>
       <p:sp>
         <p:nvSpPr>
-          <p:cNvPr id="160" name=""/>
+          <p:cNvPr id="165" name=""/>
           <p:cNvSpPr txBox="1"/>
           <p:nvPr/>
         </p:nvSpPr>
@@ -24594,7 +24804,7 @@
       </p:sp>
       <p:sp>
         <p:nvSpPr>
-          <p:cNvPr id="161" name=""/>
+          <p:cNvPr id="166" name=""/>
           <p:cNvSpPr/>
           <p:nvPr/>
         </p:nvSpPr>
@@ -24720,7 +24930,7 @@
       </p:sp>
       <p:sp>
         <p:nvSpPr>
-          <p:cNvPr id="162" name=""/>
+          <p:cNvPr id="167" name=""/>
           <p:cNvSpPr txBox="1"/>
           <p:nvPr/>
         </p:nvSpPr>
@@ -24763,7 +24973,7 @@
       </p:sp>
       <p:sp>
         <p:nvSpPr>
-          <p:cNvPr id="163" name=""/>
+          <p:cNvPr id="168" name=""/>
           <p:cNvSpPr txBox="1"/>
           <p:nvPr/>
         </p:nvSpPr>
@@ -24806,7 +25016,7 @@
       </p:sp>
       <p:sp>
         <p:nvSpPr>
-          <p:cNvPr id="164" name=""/>
+          <p:cNvPr id="169" name=""/>
           <p:cNvSpPr txBox="1"/>
           <p:nvPr/>
         </p:nvSpPr>
@@ -24849,7 +25059,7 @@
       </p:sp>
       <p:sp>
         <p:nvSpPr>
-          <p:cNvPr id="165" name=""/>
+          <p:cNvPr id="170" name=""/>
           <p:cNvSpPr txBox="1"/>
           <p:nvPr/>
         </p:nvSpPr>
@@ -24892,7 +25102,7 @@
       </p:sp>
       <p:sp>
         <p:nvSpPr>
-          <p:cNvPr id="166" name=""/>
+          <p:cNvPr id="171" name=""/>
           <p:cNvSpPr txBox="1"/>
           <p:nvPr/>
         </p:nvSpPr>
@@ -24935,7 +25145,7 @@
       </p:sp>
       <p:sp>
         <p:nvSpPr>
-          <p:cNvPr id="167" name=""/>
+          <p:cNvPr id="172" name=""/>
           <p:cNvSpPr txBox="1"/>
           <p:nvPr/>
         </p:nvSpPr>
@@ -24978,7 +25188,7 @@
       </p:sp>
       <p:sp>
         <p:nvSpPr>
-          <p:cNvPr id="168" name=""/>
+          <p:cNvPr id="173" name=""/>
           <p:cNvSpPr txBox="1"/>
           <p:nvPr/>
         </p:nvSpPr>
@@ -25021,7 +25231,7 @@
       </p:sp>
       <p:sp>
         <p:nvSpPr>
-          <p:cNvPr id="169" name=""/>
+          <p:cNvPr id="174" name=""/>
           <p:cNvSpPr/>
           <p:nvPr/>
         </p:nvSpPr>
@@ -25147,7 +25357,7 @@
       </p:sp>
       <p:sp>
         <p:nvSpPr>
-          <p:cNvPr id="170" name=""/>
+          <p:cNvPr id="175" name=""/>
           <p:cNvSpPr txBox="1"/>
           <p:nvPr/>
         </p:nvSpPr>
@@ -25200,7 +25410,7 @@
       </p:sp>
       <p:sp>
         <p:nvSpPr>
-          <p:cNvPr id="171" name=""/>
+          <p:cNvPr id="176" name=""/>
           <p:cNvSpPr txBox="1"/>
           <p:nvPr/>
         </p:nvSpPr>
@@ -25243,7 +25453,7 @@
       </p:sp>
       <p:sp>
         <p:nvSpPr>
-          <p:cNvPr id="172" name=""/>
+          <p:cNvPr id="177" name=""/>
           <p:cNvSpPr txBox="1"/>
           <p:nvPr/>
         </p:nvSpPr>
@@ -25286,7 +25496,7 @@
       </p:sp>
       <p:sp>
         <p:nvSpPr>
-          <p:cNvPr id="173" name=""/>
+          <p:cNvPr id="178" name=""/>
           <p:cNvSpPr txBox="1"/>
           <p:nvPr/>
         </p:nvSpPr>
@@ -25329,7 +25539,7 @@
       </p:sp>
       <p:sp>
         <p:nvSpPr>
-          <p:cNvPr id="174" name=""/>
+          <p:cNvPr id="179" name=""/>
           <p:cNvSpPr txBox="1"/>
           <p:nvPr/>
         </p:nvSpPr>
@@ -25382,7 +25592,7 @@
       </p:sp>
       <p:sp>
         <p:nvSpPr>
-          <p:cNvPr id="175" name=""/>
+          <p:cNvPr id="180" name=""/>
           <p:cNvSpPr/>
           <p:nvPr/>
         </p:nvSpPr>
@@ -25509,7 +25719,7 @@
       </p:sp>
       <p:sp>
         <p:nvSpPr>
-          <p:cNvPr id="176" name=""/>
+          <p:cNvPr id="181" name=""/>
           <p:cNvSpPr txBox="1"/>
           <p:nvPr/>
         </p:nvSpPr>
@@ -25552,7 +25762,7 @@
       </p:sp>
       <p:sp>
         <p:nvSpPr>
-          <p:cNvPr id="177" name=""/>
+          <p:cNvPr id="182" name=""/>
           <p:cNvSpPr txBox="1"/>
           <p:nvPr/>
         </p:nvSpPr>
@@ -25595,7 +25805,7 @@
       </p:sp>
       <p:sp>
         <p:nvSpPr>
-          <p:cNvPr id="178" name=""/>
+          <p:cNvPr id="183" name=""/>
           <p:cNvSpPr/>
           <p:nvPr/>
         </p:nvSpPr>
@@ -25722,7 +25932,7 @@
       </p:sp>
       <p:sp>
         <p:nvSpPr>
-          <p:cNvPr id="179" name=""/>
+          <p:cNvPr id="184" name=""/>
           <p:cNvSpPr txBox="1"/>
           <p:nvPr/>
         </p:nvSpPr>
@@ -25765,7 +25975,7 @@
       </p:sp>
       <p:sp>
         <p:nvSpPr>
-          <p:cNvPr id="180" name=""/>
+          <p:cNvPr id="185" name=""/>
           <p:cNvSpPr txBox="1"/>
           <p:nvPr/>
         </p:nvSpPr>
@@ -25808,7 +26018,7 @@
       </p:sp>
       <p:sp>
         <p:nvSpPr>
-          <p:cNvPr id="181" name=""/>
+          <p:cNvPr id="186" name=""/>
           <p:cNvSpPr txBox="1"/>
           <p:nvPr/>
         </p:nvSpPr>
@@ -25851,12 +26061,12 @@
       </p:sp>
       <p:pic>
         <p:nvPicPr>
-          <p:cNvPr id="182" name="" descr=""/>
+          <p:cNvPr id="187" name="" descr=""/>
           <p:cNvPicPr/>
           <p:nvPr/>
         </p:nvPicPr>
         <p:blipFill>
-          <a:blip r:embed="rId1"/>
+          <a:blip r:embed="rId2"/>
           <a:stretch/>
         </p:blipFill>
         <p:spPr>
@@ -25874,7 +26084,7 @@
       </p:pic>
       <p:sp>
         <p:nvSpPr>
-          <p:cNvPr id="183" name=""/>
+          <p:cNvPr id="188" name=""/>
           <p:cNvSpPr txBox="1"/>
           <p:nvPr/>
         </p:nvSpPr>
@@ -25917,7 +26127,7 @@
       </p:sp>
       <p:sp>
         <p:nvSpPr>
-          <p:cNvPr id="184" name=""/>
+          <p:cNvPr id="189" name=""/>
           <p:cNvSpPr txBox="1"/>
           <p:nvPr/>
         </p:nvSpPr>
@@ -25960,7 +26170,7 @@
       </p:sp>
       <p:sp>
         <p:nvSpPr>
-          <p:cNvPr id="185" name=""/>
+          <p:cNvPr id="190" name=""/>
           <p:cNvSpPr txBox="1"/>
           <p:nvPr/>
         </p:nvSpPr>
@@ -26003,7 +26213,7 @@
       </p:sp>
       <p:sp>
         <p:nvSpPr>
-          <p:cNvPr id="186" name=""/>
+          <p:cNvPr id="191" name=""/>
           <p:cNvSpPr txBox="1"/>
           <p:nvPr/>
         </p:nvSpPr>
@@ -26046,7 +26256,7 @@
       </p:sp>
       <p:sp>
         <p:nvSpPr>
-          <p:cNvPr id="187" name=""/>
+          <p:cNvPr id="192" name=""/>
           <p:cNvSpPr txBox="1"/>
           <p:nvPr/>
         </p:nvSpPr>
@@ -26089,7 +26299,7 @@
       </p:sp>
       <p:sp>
         <p:nvSpPr>
-          <p:cNvPr id="188" name=""/>
+          <p:cNvPr id="193" name=""/>
           <p:cNvSpPr txBox="1"/>
           <p:nvPr/>
         </p:nvSpPr>
@@ -26132,7 +26342,7 @@
       </p:sp>
       <p:sp>
         <p:nvSpPr>
-          <p:cNvPr id="189" name=""/>
+          <p:cNvPr id="194" name=""/>
           <p:cNvSpPr/>
           <p:nvPr/>
         </p:nvSpPr>
@@ -26270,7 +26480,7 @@
       </p:sp>
       <p:sp>
         <p:nvSpPr>
-          <p:cNvPr id="190" name=""/>
+          <p:cNvPr id="195" name=""/>
           <p:cNvSpPr txBox="1"/>
           <p:nvPr/>
         </p:nvSpPr>
@@ -26313,7 +26523,7 @@
       </p:sp>
       <p:sp>
         <p:nvSpPr>
-          <p:cNvPr id="191" name=""/>
+          <p:cNvPr id="196" name=""/>
           <p:cNvSpPr txBox="1"/>
           <p:nvPr/>
         </p:nvSpPr>
@@ -26386,7 +26596,7 @@
       </p:grpSpPr>
       <p:sp>
         <p:nvSpPr>
-          <p:cNvPr id="192" name=""/>
+          <p:cNvPr id="197" name=""/>
           <p:cNvSpPr/>
           <p:nvPr/>
         </p:nvSpPr>
@@ -26444,7 +26654,7 @@
       </p:sp>
       <p:sp>
         <p:nvSpPr>
-          <p:cNvPr id="193" name=""/>
+          <p:cNvPr id="198" name=""/>
           <p:cNvSpPr/>
           <p:nvPr/>
         </p:nvSpPr>
@@ -26502,7 +26712,7 @@
       </p:sp>
       <p:sp>
         <p:nvSpPr>
-          <p:cNvPr id="194" name=""/>
+          <p:cNvPr id="199" name=""/>
           <p:cNvSpPr/>
           <p:nvPr/>
         </p:nvSpPr>
@@ -26560,7 +26770,7 @@
       </p:sp>
       <p:sp>
         <p:nvSpPr>
-          <p:cNvPr id="195" name=""/>
+          <p:cNvPr id="200" name=""/>
           <p:cNvSpPr/>
           <p:nvPr/>
         </p:nvSpPr>
@@ -26776,9 +26986,32 @@
           </a:p>
         </p:txBody>
       </p:sp>
-      <p:sp>
-        <p:nvSpPr>
-          <p:cNvPr id="196" name=""/>
+      <p:pic>
+        <p:nvPicPr>
+          <p:cNvPr id="201" name="" descr=""/>
+          <p:cNvPicPr/>
+          <p:nvPr/>
+        </p:nvPicPr>
+        <p:blipFill>
+          <a:blip r:embed="rId1"/>
+          <a:stretch/>
+        </p:blipFill>
+        <p:spPr>
+          <a:xfrm>
+            <a:off x="10515600" y="38160"/>
+            <a:ext cx="1142640" cy="1142640"/>
+          </a:xfrm>
+          <a:prstGeom prst="rect">
+            <a:avLst/>
+          </a:prstGeom>
+          <a:ln w="0">
+            <a:noFill/>
+          </a:ln>
+        </p:spPr>
+      </p:pic>
+      <p:sp>
+        <p:nvSpPr>
+          <p:cNvPr id="202" name=""/>
           <p:cNvSpPr/>
           <p:nvPr/>
         </p:nvSpPr>
@@ -26904,7 +27137,7 @@
       </p:sp>
       <p:sp>
         <p:nvSpPr>
-          <p:cNvPr id="197" name=""/>
+          <p:cNvPr id="203" name=""/>
           <p:cNvSpPr txBox="1"/>
           <p:nvPr/>
         </p:nvSpPr>
@@ -26947,7 +27180,7 @@
       </p:sp>
       <p:sp>
         <p:nvSpPr>
-          <p:cNvPr id="198" name=""/>
+          <p:cNvPr id="204" name=""/>
           <p:cNvSpPr txBox="1"/>
           <p:nvPr/>
         </p:nvSpPr>
@@ -26990,7 +27223,7 @@
       </p:sp>
       <p:sp>
         <p:nvSpPr>
-          <p:cNvPr id="199" name=""/>
+          <p:cNvPr id="205" name=""/>
           <p:cNvSpPr txBox="1"/>
           <p:nvPr/>
         </p:nvSpPr>
@@ -27033,7 +27266,7 @@
       </p:sp>
       <p:sp>
         <p:nvSpPr>
-          <p:cNvPr id="200" name=""/>
+          <p:cNvPr id="206" name=""/>
           <p:cNvSpPr txBox="1"/>
           <p:nvPr/>
         </p:nvSpPr>
@@ -27076,7 +27309,7 @@
       </p:sp>
       <p:sp>
         <p:nvSpPr>
-          <p:cNvPr id="201" name=""/>
+          <p:cNvPr id="207" name=""/>
           <p:cNvSpPr txBox="1"/>
           <p:nvPr/>
         </p:nvSpPr>
@@ -27119,7 +27352,7 @@
       </p:sp>
       <p:sp>
         <p:nvSpPr>
-          <p:cNvPr id="202" name=""/>
+          <p:cNvPr id="208" name=""/>
           <p:cNvSpPr txBox="1"/>
           <p:nvPr/>
         </p:nvSpPr>
@@ -27162,7 +27395,7 @@
       </p:sp>
       <p:sp>
         <p:nvSpPr>
-          <p:cNvPr id="203" name=""/>
+          <p:cNvPr id="209" name=""/>
           <p:cNvSpPr/>
           <p:nvPr/>
         </p:nvSpPr>
@@ -27288,7 +27521,7 @@
       </p:sp>
       <p:sp>
         <p:nvSpPr>
-          <p:cNvPr id="204" name=""/>
+          <p:cNvPr id="210" name=""/>
           <p:cNvSpPr txBox="1"/>
           <p:nvPr/>
         </p:nvSpPr>
@@ -27331,7 +27564,7 @@
       </p:sp>
       <p:sp>
         <p:nvSpPr>
-          <p:cNvPr id="205" name=""/>
+          <p:cNvPr id="211" name=""/>
           <p:cNvSpPr txBox="1"/>
           <p:nvPr/>
         </p:nvSpPr>
@@ -27374,7 +27607,7 @@
       </p:sp>
       <p:sp>
         <p:nvSpPr>
-          <p:cNvPr id="206" name=""/>
+          <p:cNvPr id="212" name=""/>
           <p:cNvSpPr txBox="1"/>
           <p:nvPr/>
         </p:nvSpPr>
@@ -27417,7 +27650,7 @@
       </p:sp>
       <p:sp>
         <p:nvSpPr>
-          <p:cNvPr id="207" name=""/>
+          <p:cNvPr id="213" name=""/>
           <p:cNvSpPr txBox="1"/>
           <p:nvPr/>
         </p:nvSpPr>
@@ -27460,7 +27693,7 @@
       </p:sp>
       <p:sp>
         <p:nvSpPr>
-          <p:cNvPr id="208" name=""/>
+          <p:cNvPr id="214" name=""/>
           <p:cNvSpPr txBox="1"/>
           <p:nvPr/>
         </p:nvSpPr>
@@ -27503,7 +27736,7 @@
       </p:sp>
       <p:sp>
         <p:nvSpPr>
-          <p:cNvPr id="209" name=""/>
+          <p:cNvPr id="215" name=""/>
           <p:cNvSpPr txBox="1"/>
           <p:nvPr/>
         </p:nvSpPr>
@@ -27546,7 +27779,7 @@
       </p:sp>
       <p:sp>
         <p:nvSpPr>
-          <p:cNvPr id="210" name=""/>
+          <p:cNvPr id="216" name=""/>
           <p:cNvSpPr txBox="1"/>
           <p:nvPr/>
         </p:nvSpPr>
@@ -27589,7 +27822,7 @@
       </p:sp>
       <p:sp>
         <p:nvSpPr>
-          <p:cNvPr id="211" name=""/>
+          <p:cNvPr id="217" name=""/>
           <p:cNvSpPr txBox="1"/>
           <p:nvPr/>
         </p:nvSpPr>
@@ -27632,7 +27865,7 @@
       </p:sp>
       <p:sp>
         <p:nvSpPr>
-          <p:cNvPr id="212" name=""/>
+          <p:cNvPr id="218" name=""/>
           <p:cNvSpPr/>
           <p:nvPr/>
         </p:nvSpPr>
@@ -27758,7 +27991,7 @@
       </p:sp>
       <p:sp>
         <p:nvSpPr>
-          <p:cNvPr id="213" name=""/>
+          <p:cNvPr id="219" name=""/>
           <p:cNvSpPr txBox="1"/>
           <p:nvPr/>
         </p:nvSpPr>
@@ -27801,7 +28034,7 @@
       </p:sp>
       <p:sp>
         <p:nvSpPr>
-          <p:cNvPr id="214" name=""/>
+          <p:cNvPr id="220" name=""/>
           <p:cNvSpPr txBox="1"/>
           <p:nvPr/>
         </p:nvSpPr>
@@ -27844,7 +28077,7 @@
       </p:sp>
       <p:sp>
         <p:nvSpPr>
-          <p:cNvPr id="215" name=""/>
+          <p:cNvPr id="221" name=""/>
           <p:cNvSpPr txBox="1"/>
           <p:nvPr/>
         </p:nvSpPr>
@@ -27887,7 +28120,7 @@
       </p:sp>
       <p:sp>
         <p:nvSpPr>
-          <p:cNvPr id="216" name=""/>
+          <p:cNvPr id="222" name=""/>
           <p:cNvSpPr txBox="1"/>
           <p:nvPr/>
         </p:nvSpPr>
@@ -27930,7 +28163,7 @@
       </p:sp>
       <p:sp>
         <p:nvSpPr>
-          <p:cNvPr id="217" name=""/>
+          <p:cNvPr id="223" name=""/>
           <p:cNvSpPr txBox="1"/>
           <p:nvPr/>
         </p:nvSpPr>
@@ -27983,7 +28216,7 @@
       </p:sp>
       <p:sp>
         <p:nvSpPr>
-          <p:cNvPr id="218" name=""/>
+          <p:cNvPr id="224" name=""/>
           <p:cNvSpPr txBox="1"/>
           <p:nvPr/>
         </p:nvSpPr>
@@ -28026,7 +28259,7 @@
       </p:sp>
       <p:sp>
         <p:nvSpPr>
-          <p:cNvPr id="219" name=""/>
+          <p:cNvPr id="225" name=""/>
           <p:cNvSpPr/>
           <p:nvPr/>
         </p:nvSpPr>
@@ -28153,7 +28386,7 @@
       </p:sp>
       <p:sp>
         <p:nvSpPr>
-          <p:cNvPr id="220" name=""/>
+          <p:cNvPr id="226" name=""/>
           <p:cNvSpPr txBox="1"/>
           <p:nvPr/>
         </p:nvSpPr>
@@ -28206,7 +28439,7 @@
       </p:sp>
       <p:sp>
         <p:nvSpPr>
-          <p:cNvPr id="221" name=""/>
+          <p:cNvPr id="227" name=""/>
           <p:cNvSpPr txBox="1"/>
           <p:nvPr/>
         </p:nvSpPr>
@@ -28249,7 +28482,7 @@
       </p:sp>
       <p:sp>
         <p:nvSpPr>
-          <p:cNvPr id="222" name=""/>
+          <p:cNvPr id="228" name=""/>
           <p:cNvSpPr/>
           <p:nvPr/>
         </p:nvSpPr>
@@ -28376,7 +28609,7 @@
       </p:sp>
       <p:sp>
         <p:nvSpPr>
-          <p:cNvPr id="223" name=""/>
+          <p:cNvPr id="229" name=""/>
           <p:cNvSpPr txBox="1"/>
           <p:nvPr/>
         </p:nvSpPr>
@@ -28419,12 +28652,12 @@
       </p:sp>
       <p:pic>
         <p:nvPicPr>
-          <p:cNvPr id="224" name="" descr=""/>
+          <p:cNvPr id="230" name="" descr=""/>
           <p:cNvPicPr/>
           <p:nvPr/>
         </p:nvPicPr>
         <p:blipFill>
-          <a:blip r:embed="rId1"/>
+          <a:blip r:embed="rId2"/>
           <a:stretch/>
         </p:blipFill>
         <p:spPr>
@@ -28442,7 +28675,7 @@
       </p:pic>
       <p:sp>
         <p:nvSpPr>
-          <p:cNvPr id="225" name=""/>
+          <p:cNvPr id="231" name=""/>
           <p:cNvSpPr txBox="1"/>
           <p:nvPr/>
         </p:nvSpPr>
@@ -28485,7 +28718,7 @@
       </p:sp>
       <p:sp>
         <p:nvSpPr>
-          <p:cNvPr id="226" name=""/>
+          <p:cNvPr id="232" name=""/>
           <p:cNvSpPr txBox="1"/>
           <p:nvPr/>
         </p:nvSpPr>
@@ -28528,7 +28761,7 @@
       </p:sp>
       <p:sp>
         <p:nvSpPr>
-          <p:cNvPr id="227" name=""/>
+          <p:cNvPr id="233" name=""/>
           <p:cNvSpPr txBox="1"/>
           <p:nvPr/>
         </p:nvSpPr>
@@ -28571,7 +28804,7 @@
       </p:sp>
       <p:sp>
         <p:nvSpPr>
-          <p:cNvPr id="228" name=""/>
+          <p:cNvPr id="234" name=""/>
           <p:cNvSpPr txBox="1"/>
           <p:nvPr/>
         </p:nvSpPr>
@@ -28614,7 +28847,7 @@
       </p:sp>
       <p:sp>
         <p:nvSpPr>
-          <p:cNvPr id="229" name=""/>
+          <p:cNvPr id="235" name=""/>
           <p:cNvSpPr/>
           <p:nvPr/>
         </p:nvSpPr>
@@ -28752,7 +28985,7 @@
       </p:sp>
       <p:sp>
         <p:nvSpPr>
-          <p:cNvPr id="230" name=""/>
+          <p:cNvPr id="236" name=""/>
           <p:cNvSpPr txBox="1"/>
           <p:nvPr/>
         </p:nvSpPr>
@@ -28795,7 +29028,7 @@
       </p:sp>
       <p:sp>
         <p:nvSpPr>
-          <p:cNvPr id="231" name=""/>
+          <p:cNvPr id="237" name=""/>
           <p:cNvSpPr txBox="1"/>
           <p:nvPr/>
         </p:nvSpPr>
@@ -28868,7 +29101,7 @@
       </p:grpSpPr>
       <p:sp>
         <p:nvSpPr>
-          <p:cNvPr id="232" name=""/>
+          <p:cNvPr id="238" name=""/>
           <p:cNvSpPr/>
           <p:nvPr/>
         </p:nvSpPr>
@@ -28926,7 +29159,7 @@
       </p:sp>
       <p:sp>
         <p:nvSpPr>
-          <p:cNvPr id="233" name=""/>
+          <p:cNvPr id="239" name=""/>
           <p:cNvSpPr/>
           <p:nvPr/>
         </p:nvSpPr>
@@ -28984,7 +29217,7 @@
       </p:sp>
       <p:sp>
         <p:nvSpPr>
-          <p:cNvPr id="234" name=""/>
+          <p:cNvPr id="240" name=""/>
           <p:cNvSpPr/>
           <p:nvPr/>
         </p:nvSpPr>
@@ -29042,7 +29275,7 @@
       </p:sp>
       <p:sp>
         <p:nvSpPr>
-          <p:cNvPr id="235" name=""/>
+          <p:cNvPr id="241" name=""/>
           <p:cNvSpPr/>
           <p:nvPr/>
         </p:nvSpPr>
@@ -29258,9 +29491,32 @@
           </a:p>
         </p:txBody>
       </p:sp>
-      <p:sp>
-        <p:nvSpPr>
-          <p:cNvPr id="236" name=""/>
+      <p:pic>
+        <p:nvPicPr>
+          <p:cNvPr id="242" name="" descr=""/>
+          <p:cNvPicPr/>
+          <p:nvPr/>
+        </p:nvPicPr>
+        <p:blipFill>
+          <a:blip r:embed="rId1"/>
+          <a:stretch/>
+        </p:blipFill>
+        <p:spPr>
+          <a:xfrm>
+            <a:off x="10515600" y="38160"/>
+            <a:ext cx="1142640" cy="1142640"/>
+          </a:xfrm>
+          <a:prstGeom prst="rect">
+            <a:avLst/>
+          </a:prstGeom>
+          <a:ln w="0">
+            <a:noFill/>
+          </a:ln>
+        </p:spPr>
+      </p:pic>
+      <p:sp>
+        <p:nvSpPr>
+          <p:cNvPr id="243" name=""/>
           <p:cNvSpPr/>
           <p:nvPr/>
         </p:nvSpPr>
@@ -29386,7 +29642,7 @@
       </p:sp>
       <p:sp>
         <p:nvSpPr>
-          <p:cNvPr id="237" name=""/>
+          <p:cNvPr id="244" name=""/>
           <p:cNvSpPr txBox="1"/>
           <p:nvPr/>
         </p:nvSpPr>
@@ -29429,7 +29685,7 @@
       </p:sp>
       <p:sp>
         <p:nvSpPr>
-          <p:cNvPr id="238" name=""/>
+          <p:cNvPr id="245" name=""/>
           <p:cNvSpPr txBox="1"/>
           <p:nvPr/>
         </p:nvSpPr>
@@ -29472,7 +29728,7 @@
       </p:sp>
       <p:sp>
         <p:nvSpPr>
-          <p:cNvPr id="239" name=""/>
+          <p:cNvPr id="246" name=""/>
           <p:cNvSpPr txBox="1"/>
           <p:nvPr/>
         </p:nvSpPr>
@@ -29515,7 +29771,7 @@
       </p:sp>
       <p:sp>
         <p:nvSpPr>
-          <p:cNvPr id="240" name=""/>
+          <p:cNvPr id="247" name=""/>
           <p:cNvSpPr txBox="1"/>
           <p:nvPr/>
         </p:nvSpPr>
@@ -29558,7 +29814,7 @@
       </p:sp>
       <p:sp>
         <p:nvSpPr>
-          <p:cNvPr id="241" name=""/>
+          <p:cNvPr id="248" name=""/>
           <p:cNvSpPr txBox="1"/>
           <p:nvPr/>
         </p:nvSpPr>
@@ -29601,7 +29857,7 @@
       </p:sp>
       <p:sp>
         <p:nvSpPr>
-          <p:cNvPr id="242" name=""/>
+          <p:cNvPr id="249" name=""/>
           <p:cNvSpPr txBox="1"/>
           <p:nvPr/>
         </p:nvSpPr>
@@ -29644,7 +29900,7 @@
       </p:sp>
       <p:sp>
         <p:nvSpPr>
-          <p:cNvPr id="243" name=""/>
+          <p:cNvPr id="250" name=""/>
           <p:cNvSpPr/>
           <p:nvPr/>
         </p:nvSpPr>
@@ -29770,7 +30026,7 @@
       </p:sp>
       <p:sp>
         <p:nvSpPr>
-          <p:cNvPr id="244" name=""/>
+          <p:cNvPr id="251" name=""/>
           <p:cNvSpPr txBox="1"/>
           <p:nvPr/>
         </p:nvSpPr>
@@ -29813,7 +30069,7 @@
       </p:sp>
       <p:sp>
         <p:nvSpPr>
-          <p:cNvPr id="245" name=""/>
+          <p:cNvPr id="252" name=""/>
           <p:cNvSpPr txBox="1"/>
           <p:nvPr/>
         </p:nvSpPr>
@@ -29856,7 +30112,7 @@
       </p:sp>
       <p:sp>
         <p:nvSpPr>
-          <p:cNvPr id="246" name=""/>
+          <p:cNvPr id="253" name=""/>
           <p:cNvSpPr txBox="1"/>
           <p:nvPr/>
         </p:nvSpPr>
@@ -29909,7 +30165,7 @@
       </p:sp>
       <p:sp>
         <p:nvSpPr>
-          <p:cNvPr id="247" name=""/>
+          <p:cNvPr id="254" name=""/>
           <p:cNvSpPr txBox="1"/>
           <p:nvPr/>
         </p:nvSpPr>
@@ -29952,7 +30208,7 @@
       </p:sp>
       <p:sp>
         <p:nvSpPr>
-          <p:cNvPr id="248" name=""/>
+          <p:cNvPr id="255" name=""/>
           <p:cNvSpPr txBox="1"/>
           <p:nvPr/>
         </p:nvSpPr>
@@ -29995,7 +30251,7 @@
       </p:sp>
       <p:sp>
         <p:nvSpPr>
-          <p:cNvPr id="249" name=""/>
+          <p:cNvPr id="256" name=""/>
           <p:cNvSpPr txBox="1"/>
           <p:nvPr/>
         </p:nvSpPr>
@@ -30038,7 +30294,7 @@
       </p:sp>
       <p:sp>
         <p:nvSpPr>
-          <p:cNvPr id="250" name=""/>
+          <p:cNvPr id="257" name=""/>
           <p:cNvSpPr txBox="1"/>
           <p:nvPr/>
         </p:nvSpPr>
@@ -30081,7 +30337,7 @@
       </p:sp>
       <p:sp>
         <p:nvSpPr>
-          <p:cNvPr id="251" name=""/>
+          <p:cNvPr id="258" name=""/>
           <p:cNvSpPr txBox="1"/>
           <p:nvPr/>
         </p:nvSpPr>
@@ -30124,7 +30380,7 @@
       </p:sp>
       <p:sp>
         <p:nvSpPr>
-          <p:cNvPr id="252" name=""/>
+          <p:cNvPr id="259" name=""/>
           <p:cNvSpPr txBox="1"/>
           <p:nvPr/>
         </p:nvSpPr>
@@ -30167,7 +30423,7 @@
       </p:sp>
       <p:sp>
         <p:nvSpPr>
-          <p:cNvPr id="253" name=""/>
+          <p:cNvPr id="260" name=""/>
           <p:cNvSpPr/>
           <p:nvPr/>
         </p:nvSpPr>
@@ -30294,7 +30550,7 @@
       </p:sp>
       <p:sp>
         <p:nvSpPr>
-          <p:cNvPr id="254" name=""/>
+          <p:cNvPr id="261" name=""/>
           <p:cNvSpPr txBox="1"/>
           <p:nvPr/>
         </p:nvSpPr>
@@ -30337,7 +30593,7 @@
       </p:sp>
       <p:sp>
         <p:nvSpPr>
-          <p:cNvPr id="255" name=""/>
+          <p:cNvPr id="262" name=""/>
           <p:cNvSpPr txBox="1"/>
           <p:nvPr/>
         </p:nvSpPr>
@@ -30380,7 +30636,7 @@
       </p:sp>
       <p:sp>
         <p:nvSpPr>
-          <p:cNvPr id="256" name=""/>
+          <p:cNvPr id="263" name=""/>
           <p:cNvSpPr txBox="1"/>
           <p:nvPr/>
         </p:nvSpPr>
@@ -30423,7 +30679,7 @@
       </p:sp>
       <p:sp>
         <p:nvSpPr>
-          <p:cNvPr id="257" name=""/>
+          <p:cNvPr id="264" name=""/>
           <p:cNvSpPr/>
           <p:nvPr/>
         </p:nvSpPr>
@@ -30550,7 +30806,7 @@
       </p:sp>
       <p:sp>
         <p:nvSpPr>
-          <p:cNvPr id="258" name=""/>
+          <p:cNvPr id="265" name=""/>
           <p:cNvSpPr txBox="1"/>
           <p:nvPr/>
         </p:nvSpPr>
@@ -30593,7 +30849,7 @@
       </p:sp>
       <p:sp>
         <p:nvSpPr>
-          <p:cNvPr id="259" name=""/>
+          <p:cNvPr id="266" name=""/>
           <p:cNvSpPr txBox="1"/>
           <p:nvPr/>
         </p:nvSpPr>
@@ -30636,7 +30892,7 @@
       </p:sp>
       <p:sp>
         <p:nvSpPr>
-          <p:cNvPr id="260" name=""/>
+          <p:cNvPr id="267" name=""/>
           <p:cNvSpPr txBox="1"/>
           <p:nvPr/>
         </p:nvSpPr>
@@ -30679,7 +30935,7 @@
       </p:sp>
       <p:sp>
         <p:nvSpPr>
-          <p:cNvPr id="261" name=""/>
+          <p:cNvPr id="268" name=""/>
           <p:cNvSpPr/>
           <p:nvPr/>
         </p:nvSpPr>
@@ -30806,7 +31062,7 @@
       </p:sp>
       <p:sp>
         <p:nvSpPr>
-          <p:cNvPr id="262" name=""/>
+          <p:cNvPr id="269" name=""/>
           <p:cNvSpPr txBox="1"/>
           <p:nvPr/>
         </p:nvSpPr>
@@ -30849,7 +31105,7 @@
       </p:sp>
       <p:sp>
         <p:nvSpPr>
-          <p:cNvPr id="263" name=""/>
+          <p:cNvPr id="270" name=""/>
           <p:cNvSpPr txBox="1"/>
           <p:nvPr/>
         </p:nvSpPr>
@@ -30892,12 +31148,12 @@
       </p:sp>
       <p:pic>
         <p:nvPicPr>
-          <p:cNvPr id="264" name="" descr=""/>
+          <p:cNvPr id="271" name="" descr=""/>
           <p:cNvPicPr/>
           <p:nvPr/>
         </p:nvPicPr>
         <p:blipFill>
-          <a:blip r:embed="rId1"/>
+          <a:blip r:embed="rId2"/>
           <a:stretch/>
         </p:blipFill>
         <p:spPr>
@@ -30915,7 +31171,7 @@
       </p:pic>
       <p:sp>
         <p:nvSpPr>
-          <p:cNvPr id="265" name=""/>
+          <p:cNvPr id="272" name=""/>
           <p:cNvSpPr txBox="1"/>
           <p:nvPr/>
         </p:nvSpPr>
@@ -30958,7 +31214,7 @@
       </p:sp>
       <p:sp>
         <p:nvSpPr>
-          <p:cNvPr id="266" name=""/>
+          <p:cNvPr id="273" name=""/>
           <p:cNvSpPr txBox="1"/>
           <p:nvPr/>
         </p:nvSpPr>
@@ -31001,7 +31257,7 @@
       </p:sp>
       <p:sp>
         <p:nvSpPr>
-          <p:cNvPr id="267" name=""/>
+          <p:cNvPr id="274" name=""/>
           <p:cNvSpPr txBox="1"/>
           <p:nvPr/>
         </p:nvSpPr>
@@ -31044,7 +31300,7 @@
       </p:sp>
       <p:sp>
         <p:nvSpPr>
-          <p:cNvPr id="268" name=""/>
+          <p:cNvPr id="275" name=""/>
           <p:cNvSpPr/>
           <p:nvPr/>
         </p:nvSpPr>
@@ -31182,7 +31438,7 @@
       </p:sp>
       <p:sp>
         <p:nvSpPr>
-          <p:cNvPr id="269" name=""/>
+          <p:cNvPr id="276" name=""/>
           <p:cNvSpPr txBox="1"/>
           <p:nvPr/>
         </p:nvSpPr>
@@ -31225,7 +31481,7 @@
       </p:sp>
       <p:sp>
         <p:nvSpPr>
-          <p:cNvPr id="270" name=""/>
+          <p:cNvPr id="277" name=""/>
           <p:cNvSpPr txBox="1"/>
           <p:nvPr/>
         </p:nvSpPr>
@@ -31298,7 +31554,7 @@
       </p:grpSpPr>
       <p:sp>
         <p:nvSpPr>
-          <p:cNvPr id="271" name=""/>
+          <p:cNvPr id="278" name=""/>
           <p:cNvSpPr/>
           <p:nvPr/>
         </p:nvSpPr>
@@ -31356,7 +31612,7 @@
       </p:sp>
       <p:sp>
         <p:nvSpPr>
-          <p:cNvPr id="272" name=""/>
+          <p:cNvPr id="279" name=""/>
           <p:cNvSpPr/>
           <p:nvPr/>
         </p:nvSpPr>
@@ -31414,7 +31670,7 @@
       </p:sp>
       <p:sp>
         <p:nvSpPr>
-          <p:cNvPr id="273" name=""/>
+          <p:cNvPr id="280" name=""/>
           <p:cNvSpPr/>
           <p:nvPr/>
         </p:nvSpPr>
@@ -31472,7 +31728,7 @@
       </p:sp>
       <p:sp>
         <p:nvSpPr>
-          <p:cNvPr id="274" name=""/>
+          <p:cNvPr id="281" name=""/>
           <p:cNvSpPr/>
           <p:nvPr/>
         </p:nvSpPr>
@@ -31688,9 +31944,32 @@
           </a:p>
         </p:txBody>
       </p:sp>
-      <p:sp>
-        <p:nvSpPr>
-          <p:cNvPr id="275" name=""/>
+      <p:pic>
+        <p:nvPicPr>
+          <p:cNvPr id="282" name="" descr=""/>
+          <p:cNvPicPr/>
+          <p:nvPr/>
+        </p:nvPicPr>
+        <p:blipFill>
+          <a:blip r:embed="rId1"/>
+          <a:stretch/>
+        </p:blipFill>
+        <p:spPr>
+          <a:xfrm>
+            <a:off x="10515600" y="38160"/>
+            <a:ext cx="1142640" cy="1142640"/>
+          </a:xfrm>
+          <a:prstGeom prst="rect">
+            <a:avLst/>
+          </a:prstGeom>
+          <a:ln w="0">
+            <a:noFill/>
+          </a:ln>
+        </p:spPr>
+      </p:pic>
+      <p:sp>
+        <p:nvSpPr>
+          <p:cNvPr id="283" name=""/>
           <p:cNvSpPr/>
           <p:nvPr/>
         </p:nvSpPr>
@@ -31816,7 +32095,7 @@
       </p:sp>
       <p:sp>
         <p:nvSpPr>
-          <p:cNvPr id="276" name=""/>
+          <p:cNvPr id="284" name=""/>
           <p:cNvSpPr txBox="1"/>
           <p:nvPr/>
         </p:nvSpPr>
@@ -31859,7 +32138,7 @@
       </p:sp>
       <p:sp>
         <p:nvSpPr>
-          <p:cNvPr id="277" name=""/>
+          <p:cNvPr id="285" name=""/>
           <p:cNvSpPr/>
           <p:nvPr/>
         </p:nvSpPr>
@@ -31986,7 +32265,7 @@
       </p:sp>
       <p:sp>
         <p:nvSpPr>
-          <p:cNvPr id="278" name=""/>
+          <p:cNvPr id="286" name=""/>
           <p:cNvSpPr txBox="1"/>
           <p:nvPr/>
         </p:nvSpPr>
@@ -32029,7 +32308,7 @@
       </p:sp>
       <p:sp>
         <p:nvSpPr>
-          <p:cNvPr id="279" name=""/>
+          <p:cNvPr id="287" name=""/>
           <p:cNvSpPr txBox="1"/>
           <p:nvPr/>
         </p:nvSpPr>
@@ -32072,7 +32351,7 @@
       </p:sp>
       <p:sp>
         <p:nvSpPr>
-          <p:cNvPr id="280" name=""/>
+          <p:cNvPr id="288" name=""/>
           <p:cNvSpPr txBox="1"/>
           <p:nvPr/>
         </p:nvSpPr>
@@ -32115,7 +32394,7 @@
       </p:sp>
       <p:sp>
         <p:nvSpPr>
-          <p:cNvPr id="281" name=""/>
+          <p:cNvPr id="289" name=""/>
           <p:cNvSpPr txBox="1"/>
           <p:nvPr/>
         </p:nvSpPr>
@@ -32158,7 +32437,7 @@
       </p:sp>
       <p:sp>
         <p:nvSpPr>
-          <p:cNvPr id="282" name=""/>
+          <p:cNvPr id="290" name=""/>
           <p:cNvSpPr/>
           <p:nvPr/>
         </p:nvSpPr>
@@ -32285,7 +32564,7 @@
       </p:sp>
       <p:sp>
         <p:nvSpPr>
-          <p:cNvPr id="283" name=""/>
+          <p:cNvPr id="291" name=""/>
           <p:cNvSpPr txBox="1"/>
           <p:nvPr/>
         </p:nvSpPr>
@@ -32328,7 +32607,7 @@
       </p:sp>
       <p:sp>
         <p:nvSpPr>
-          <p:cNvPr id="284" name=""/>
+          <p:cNvPr id="292" name=""/>
           <p:cNvSpPr txBox="1"/>
           <p:nvPr/>
         </p:nvSpPr>
@@ -32371,7 +32650,7 @@
       </p:sp>
       <p:sp>
         <p:nvSpPr>
-          <p:cNvPr id="285" name=""/>
+          <p:cNvPr id="293" name=""/>
           <p:cNvSpPr txBox="1"/>
           <p:nvPr/>
         </p:nvSpPr>
@@ -32414,7 +32693,7 @@
       </p:sp>
       <p:sp>
         <p:nvSpPr>
-          <p:cNvPr id="286" name=""/>
+          <p:cNvPr id="294" name=""/>
           <p:cNvSpPr txBox="1"/>
           <p:nvPr/>
         </p:nvSpPr>
@@ -32457,7 +32736,7 @@
       </p:sp>
       <p:sp>
         <p:nvSpPr>
-          <p:cNvPr id="287" name=""/>
+          <p:cNvPr id="295" name=""/>
           <p:cNvSpPr txBox="1"/>
           <p:nvPr/>
         </p:nvSpPr>
@@ -32500,7 +32779,7 @@
       </p:sp>
       <p:sp>
         <p:nvSpPr>
-          <p:cNvPr id="288" name=""/>
+          <p:cNvPr id="296" name=""/>
           <p:cNvSpPr txBox="1"/>
           <p:nvPr/>
         </p:nvSpPr>
@@ -32543,7 +32822,7 @@
       </p:sp>
       <p:sp>
         <p:nvSpPr>
-          <p:cNvPr id="289" name=""/>
+          <p:cNvPr id="297" name=""/>
           <p:cNvSpPr/>
           <p:nvPr/>
         </p:nvSpPr>
@@ -32669,7 +32948,7 @@
       </p:sp>
       <p:sp>
         <p:nvSpPr>
-          <p:cNvPr id="290" name=""/>
+          <p:cNvPr id="298" name=""/>
           <p:cNvSpPr txBox="1"/>
           <p:nvPr/>
         </p:nvSpPr>
@@ -32712,7 +32991,7 @@
       </p:sp>
       <p:sp>
         <p:nvSpPr>
-          <p:cNvPr id="291" name=""/>
+          <p:cNvPr id="299" name=""/>
           <p:cNvSpPr/>
           <p:nvPr/>
         </p:nvSpPr>
@@ -32839,7 +33118,7 @@
       </p:sp>
       <p:sp>
         <p:nvSpPr>
-          <p:cNvPr id="292" name=""/>
+          <p:cNvPr id="300" name=""/>
           <p:cNvSpPr txBox="1"/>
           <p:nvPr/>
         </p:nvSpPr>
@@ -32882,7 +33161,7 @@
       </p:sp>
       <p:sp>
         <p:nvSpPr>
-          <p:cNvPr id="293" name=""/>
+          <p:cNvPr id="301" name=""/>
           <p:cNvSpPr txBox="1"/>
           <p:nvPr/>
         </p:nvSpPr>
@@ -32925,7 +33204,7 @@
       </p:sp>
       <p:sp>
         <p:nvSpPr>
-          <p:cNvPr id="294" name=""/>
+          <p:cNvPr id="302" name=""/>
           <p:cNvSpPr txBox="1"/>
           <p:nvPr/>
         </p:nvSpPr>
@@ -32968,7 +33247,7 @@
       </p:sp>
       <p:sp>
         <p:nvSpPr>
-          <p:cNvPr id="295" name=""/>
+          <p:cNvPr id="303" name=""/>
           <p:cNvSpPr txBox="1"/>
           <p:nvPr/>
         </p:nvSpPr>
@@ -33011,7 +33290,7 @@
       </p:sp>
       <p:sp>
         <p:nvSpPr>
-          <p:cNvPr id="296" name=""/>
+          <p:cNvPr id="304" name=""/>
           <p:cNvSpPr txBox="1"/>
           <p:nvPr/>
         </p:nvSpPr>
@@ -33054,7 +33333,7 @@
       </p:sp>
       <p:sp>
         <p:nvSpPr>
-          <p:cNvPr id="297" name=""/>
+          <p:cNvPr id="305" name=""/>
           <p:cNvSpPr txBox="1"/>
           <p:nvPr/>
         </p:nvSpPr>
@@ -33107,7 +33386,7 @@
       </p:sp>
       <p:sp>
         <p:nvSpPr>
-          <p:cNvPr id="298" name=""/>
+          <p:cNvPr id="306" name=""/>
           <p:cNvSpPr txBox="1"/>
           <p:nvPr/>
         </p:nvSpPr>
@@ -33150,7 +33429,7 @@
       </p:sp>
       <p:sp>
         <p:nvSpPr>
-          <p:cNvPr id="299" name=""/>
+          <p:cNvPr id="307" name=""/>
           <p:cNvSpPr txBox="1"/>
           <p:nvPr/>
         </p:nvSpPr>
@@ -33193,7 +33472,7 @@
       </p:sp>
       <p:sp>
         <p:nvSpPr>
-          <p:cNvPr id="300" name=""/>
+          <p:cNvPr id="308" name=""/>
           <p:cNvSpPr txBox="1"/>
           <p:nvPr/>
         </p:nvSpPr>
@@ -33236,7 +33515,7 @@
       </p:sp>
       <p:sp>
         <p:nvSpPr>
-          <p:cNvPr id="301" name=""/>
+          <p:cNvPr id="309" name=""/>
           <p:cNvSpPr txBox="1"/>
           <p:nvPr/>
         </p:nvSpPr>
@@ -33279,7 +33558,7 @@
       </p:sp>
       <p:sp>
         <p:nvSpPr>
-          <p:cNvPr id="302" name=""/>
+          <p:cNvPr id="310" name=""/>
           <p:cNvSpPr/>
           <p:nvPr/>
         </p:nvSpPr>
@@ -33405,7 +33684,7 @@
       </p:sp>
       <p:sp>
         <p:nvSpPr>
-          <p:cNvPr id="303" name=""/>
+          <p:cNvPr id="311" name=""/>
           <p:cNvSpPr txBox="1"/>
           <p:nvPr/>
         </p:nvSpPr>
@@ -33448,7 +33727,7 @@
       </p:sp>
       <p:sp>
         <p:nvSpPr>
-          <p:cNvPr id="304" name=""/>
+          <p:cNvPr id="312" name=""/>
           <p:cNvSpPr/>
           <p:nvPr/>
         </p:nvSpPr>
@@ -33575,7 +33854,7 @@
       </p:sp>
       <p:sp>
         <p:nvSpPr>
-          <p:cNvPr id="305" name=""/>
+          <p:cNvPr id="313" name=""/>
           <p:cNvSpPr txBox="1"/>
           <p:nvPr/>
         </p:nvSpPr>
@@ -33618,7 +33897,7 @@
       </p:sp>
       <p:sp>
         <p:nvSpPr>
-          <p:cNvPr id="306" name=""/>
+          <p:cNvPr id="314" name=""/>
           <p:cNvSpPr txBox="1"/>
           <p:nvPr/>
         </p:nvSpPr>
@@ -33661,7 +33940,7 @@
       </p:sp>
       <p:sp>
         <p:nvSpPr>
-          <p:cNvPr id="307" name=""/>
+          <p:cNvPr id="315" name=""/>
           <p:cNvSpPr txBox="1"/>
           <p:nvPr/>
         </p:nvSpPr>
@@ -33704,7 +33983,7 @@
       </p:sp>
       <p:sp>
         <p:nvSpPr>
-          <p:cNvPr id="308" name=""/>
+          <p:cNvPr id="316" name=""/>
           <p:cNvSpPr txBox="1"/>
           <p:nvPr/>
         </p:nvSpPr>
@@ -33747,7 +34026,7 @@
       </p:sp>
       <p:sp>
         <p:nvSpPr>
-          <p:cNvPr id="309" name=""/>
+          <p:cNvPr id="317" name=""/>
           <p:cNvSpPr txBox="1"/>
           <p:nvPr/>
         </p:nvSpPr>
@@ -33790,7 +34069,7 @@
       </p:sp>
       <p:sp>
         <p:nvSpPr>
-          <p:cNvPr id="310" name=""/>
+          <p:cNvPr id="318" name=""/>
           <p:cNvSpPr txBox="1"/>
           <p:nvPr/>
         </p:nvSpPr>
@@ -33833,7 +34112,7 @@
       </p:sp>
       <p:sp>
         <p:nvSpPr>
-          <p:cNvPr id="311" name=""/>
+          <p:cNvPr id="319" name=""/>
           <p:cNvSpPr txBox="1"/>
           <p:nvPr/>
         </p:nvSpPr>
@@ -33876,7 +34155,7 @@
       </p:sp>
       <p:sp>
         <p:nvSpPr>
-          <p:cNvPr id="312" name=""/>
+          <p:cNvPr id="320" name=""/>
           <p:cNvSpPr txBox="1"/>
           <p:nvPr/>
         </p:nvSpPr>
@@ -33919,7 +34198,7 @@
       </p:sp>
       <p:sp>
         <p:nvSpPr>
-          <p:cNvPr id="313" name=""/>
+          <p:cNvPr id="321" name=""/>
           <p:cNvSpPr txBox="1"/>
           <p:nvPr/>
         </p:nvSpPr>
@@ -33962,7 +34241,7 @@
       </p:sp>
       <p:sp>
         <p:nvSpPr>
-          <p:cNvPr id="314" name=""/>
+          <p:cNvPr id="322" name=""/>
           <p:cNvSpPr/>
           <p:nvPr/>
         </p:nvSpPr>
@@ -34100,7 +34379,7 @@
       </p:sp>
       <p:sp>
         <p:nvSpPr>
-          <p:cNvPr id="315" name=""/>
+          <p:cNvPr id="323" name=""/>
           <p:cNvSpPr txBox="1"/>
           <p:nvPr/>
         </p:nvSpPr>
@@ -34143,7 +34422,7 @@
       </p:sp>
       <p:sp>
         <p:nvSpPr>
-          <p:cNvPr id="316" name=""/>
+          <p:cNvPr id="324" name=""/>
           <p:cNvSpPr txBox="1"/>
           <p:nvPr/>
         </p:nvSpPr>
